--- a/week04_capstone/W04_Capstone_Deck.pptx
+++ b/week04_capstone/W04_Capstone_Deck.pptx
@@ -1,26 +1,26 @@
 
 <file path=ppt/presentation.xml><?xml version="1.0" encoding="utf-8"?>
-<p:presentation xmlns:a="http://schemas.openxmlformats.org/drawingml/2006/main" xmlns:r="http://schemas.openxmlformats.org/officeDocument/2006/relationships" xmlns:p="http://schemas.openxmlformats.org/presentationml/2006/main" saveSubsetFonts="1" autoCompressPictures="0">
+<p:presentation xmlns:a="http://schemas.openxmlformats.org/drawingml/2006/main" xmlns:r="http://schemas.openxmlformats.org/officeDocument/2006/relationships" xmlns:p="http://schemas.openxmlformats.org/presentationml/2006/main" autoCompressPictures="0">
   <p:sldMasterIdLst>
     <p:sldMasterId id="2147483648" r:id="rId1"/>
   </p:sldMasterIdLst>
+  <p:notesMasterIdLst>
+    <p:notesMasterId r:id="rId4"/>
+  </p:notesMasterIdLst>
   <p:sldIdLst>
-    <p:sldId id="256" r:id="rId2"/>
-    <p:sldId id="257" r:id="rId3"/>
-    <p:sldId id="258" r:id="rId4"/>
-    <p:sldId id="259" r:id="rId5"/>
-    <p:sldId id="260" r:id="rId6"/>
-    <p:sldId id="261" r:id="rId7"/>
-    <p:sldId id="262" r:id="rId8"/>
-    <p:sldId id="263" r:id="rId9"/>
-    <p:sldId id="264" r:id="rId10"/>
-    <p:sldId id="265" r:id="rId11"/>
-    <p:sldId id="266" r:id="rId12"/>
-    <p:sldId id="267" r:id="rId13"/>
+    <p:sldId id="256" r:id="rId3"/>
+    <p:sldId id="257" r:id="rId5"/>
+    <p:sldId id="258" r:id="rId6"/>
+    <p:sldId id="259" r:id="rId7"/>
+    <p:sldId id="260" r:id="rId8"/>
+    <p:sldId id="261" r:id="rId9"/>
+    <p:sldId id="262" r:id="rId10"/>
+    <p:sldId id="263" r:id="rId11"/>
+    <p:sldId id="264" r:id="rId12"/>
+    <p:sldId id="265" r:id="rId13"/>
+    <p:sldId id="266" r:id="rId14"/>
+    <p:sldId id="267" r:id="rId15"/>
   </p:sldIdLst>
-  <p:notesMasterIdLst>
-    <p:notesMasterId r:id="rId14"/>
-  </p:notesMasterIdLst>
   <p:sldSz cx="12192000" cy="6858000"/>
   <p:notesSz cx="6858000" cy="12192000"/>
   <p:defaultTextStyle>
@@ -121,20 +121,31 @@
 <file path=ppt/charts/chart1.xml><?xml version="1.0" encoding="utf-8"?>
 <c:chartSpace xmlns:c="http://schemas.openxmlformats.org/drawingml/2006/chart" xmlns:a="http://schemas.openxmlformats.org/drawingml/2006/main" xmlns:r="http://schemas.openxmlformats.org/officeDocument/2006/relationships">
   <c:date1904 val="0"/>
+  <c:lang val="zh-CN"/>
   <c:roundedCorners val="1"/>
+  <mc:AlternateContent xmlns:mc="http://schemas.openxmlformats.org/markup-compatibility/2006">
+    <mc:Choice xmlns:c14="http://schemas.microsoft.com/office/drawing/2007/8/2/chart" Requires="c14">
+      <c14:style val="102"/>
+    </mc:Choice>
+    <mc:Fallback>
+      <c:style val="2"/>
+    </mc:Fallback>
+  </mc:AlternateContent>
   <c:chart>
     <c:title>
       <c:tx>
         <c:rich>
-          <a:bodyPr/>
+          <a:bodyPr rot="0" spcFirstLastPara="0" vertOverflow="ellipsis" vert="horz" wrap="square" anchor="ctr" anchorCtr="1"/>
           <a:lstStyle/>
           <a:p>
             <a:pPr>
-              <a:defRPr sz="1200" b="0" i="0" u="none" strike="noStrike">
+              <a:defRPr lang="en-US" sz="1200" b="0" i="0" u="none" strike="noStrike" kern="1200" baseline="0">
                 <a:solidFill>
                   <a:srgbClr val="000000"/>
                 </a:solidFill>
-                <a:latin typeface="Arial"/>
+                <a:latin typeface="Arial" panose="020B0604020202090204"/>
+                <a:ea typeface="+mn-ea"/>
+                <a:cs typeface="+mn-cs"/>
               </a:defRPr>
             </a:pPr>
             <a:r>
@@ -142,10 +153,16 @@
                 <a:solidFill>
                   <a:srgbClr val="000000"/>
                 </a:solidFill>
-                <a:latin typeface="Arial"/>
+                <a:latin typeface="Arial" panose="020B0604020202090204"/>
               </a:rPr>
               <a:t>Mean latency (ms), 200 warm-up-free runs</a:t>
             </a:r>
+            <a:endParaRPr sz="1200" b="0" i="0" u="none" strike="noStrike">
+              <a:solidFill>
+                <a:srgbClr val="000000"/>
+              </a:solidFill>
+              <a:latin typeface="Arial" panose="020B0604020202090204"/>
+            </a:endParaRPr>
           </a:p>
         </c:rich>
       </c:tx>
@@ -182,20 +199,30 @@
           <c:invertIfNegative val="0"/>
           <c:dLbls>
             <c:numFmt formatCode="0.0000" sourceLinked="0"/>
+            <c:spPr>
+              <a:noFill/>
+              <a:ln>
+                <a:noFill/>
+              </a:ln>
+              <a:effectLst/>
+            </c:spPr>
             <c:txPr>
-              <a:bodyPr/>
+              <a:bodyPr rot="0" spcFirstLastPara="0" vertOverflow="ellipsis" vert="horz" wrap="square" lIns="38100" tIns="19050" rIns="38100" bIns="19050" anchor="ctr" anchorCtr="1"/>
               <a:lstStyle/>
               <a:p>
                 <a:pPr>
-                  <a:defRPr b="0" i="0" strike="noStrike" sz="1000" u="none">
+                  <a:defRPr lang="en-US" sz="1000" b="0" i="0" u="none" strike="noStrike" kern="1200" baseline="0">
                     <a:solidFill>
                       <a:srgbClr val="000000"/>
                     </a:solidFill>
-                    <a:latin typeface="Arial"/>
+                    <a:latin typeface="Arial" panose="020B0604020202090204"/>
+                    <a:ea typeface="+mn-ea"/>
+                    <a:cs typeface="+mn-cs"/>
                   </a:defRPr>
                 </a:pPr>
               </a:p>
             </c:txPr>
+            <c:dLblPos val="outEnd"/>
             <c:showLegendKey val="0"/>
             <c:showVal val="1"/>
             <c:showCatName val="0"/>
@@ -203,22 +230,27 @@
             <c:showPercent val="0"/>
             <c:showBubbleSize val="0"/>
             <c:showLeaderLines val="0"/>
+            <c:extLst>
+              <c:ext xmlns:c15="http://schemas.microsoft.com/office/drawing/2012/chart" uri="{CE6537A1-D6FC-4f65-9D91-7224C49458BB}">
+                <c15:layout/>
+                <c15:showLeaderLines val="0"/>
+                <c15:leaderLines/>
+              </c:ext>
+            </c:extLst>
           </c:dLbls>
           <c:cat>
-            <c:multiLvlStrRef>
+            <c:strRef>
               <c:f>Sheet1!$A$2:$A$3</c:f>
-              <c:multiLvlStrCache>
+              <c:strCache>
                 <c:ptCount val="2"/>
-                <c:lvl>
-                  <c:pt idx="0">
-                    <c:v>FP32</c:v>
-                  </c:pt>
-                  <c:pt idx="1">
-                    <c:v>INT8</c:v>
-                  </c:pt>
-                </c:lvl>
-              </c:multiLvlStrCache>
-            </c:multiLvlStrRef>
+                <c:pt idx="0">
+                  <c:v>FP32</c:v>
+                </c:pt>
+                <c:pt idx="1">
+                  <c:v>INT8</c:v>
+                </c:pt>
+              </c:strCache>
+            </c:strRef>
           </c:cat>
           <c:val>
             <c:numRef>
@@ -237,34 +269,17 @@
           </c:val>
         </c:ser>
         <c:dLbls>
-          <c:numFmt formatCode="0.0000" sourceLinked="0"/>
-          <c:txPr>
-            <a:bodyPr/>
-            <a:lstStyle/>
-            <a:p>
-              <a:pPr>
-                <a:defRPr b="0" i="0" strike="noStrike" sz="1000" u="none">
-                  <a:solidFill>
-                    <a:srgbClr val="000000"/>
-                  </a:solidFill>
-                  <a:latin typeface="Arial"/>
-                </a:defRPr>
-              </a:pPr>
-            </a:p>
-          </c:txPr>
           <c:showLegendKey val="0"/>
           <c:showVal val="1"/>
           <c:showCatName val="0"/>
           <c:showSerName val="0"/>
           <c:showPercent val="0"/>
           <c:showBubbleSize val="0"/>
-          <c:showLeaderLines val="0"/>
         </c:dLbls>
         <c:gapWidth val="150"/>
         <c:overlap val="0"/>
         <c:axId val="2094734554"/>
         <c:axId val="2094734552"/>
-        <c:axId val="2094734556"/>
       </c:barChart>
       <c:catAx>
         <c:axId val="2094734554"/>
@@ -278,7 +293,7 @@
         <c:minorTickMark val="none"/>
         <c:tickLblPos val="low"/>
         <c:spPr>
-          <a:ln w="12700" cap="flat">
+          <a:ln w="12700" cap="flat" cmpd="sng" algn="ctr">
             <a:solidFill>
               <a:srgbClr val="888888"/>
             </a:solidFill>
@@ -287,24 +302,26 @@
           </a:ln>
         </c:spPr>
         <c:txPr>
-          <a:bodyPr/>
+          <a:bodyPr rot="-60000000" spcFirstLastPara="0" vertOverflow="ellipsis" vert="horz" wrap="square" anchor="ctr" anchorCtr="1"/>
           <a:lstStyle/>
           <a:p>
             <a:pPr>
-              <a:defRPr sz="1200" b="0" i="0" u="none" strike="noStrike">
+              <a:defRPr lang="en-US" sz="1200" b="0" i="0" u="none" strike="noStrike" kern="1200" baseline="0">
                 <a:solidFill>
                   <a:srgbClr val="16253D"/>
                 </a:solidFill>
-                <a:latin typeface="Arial"/>
+                <a:latin typeface="Arial" panose="020B0604020202090204"/>
+                <a:ea typeface="+mn-ea"/>
+                <a:cs typeface="+mn-cs"/>
               </a:defRPr>
             </a:pPr>
-            <a:endParaRPr lang="en-US"/>
           </a:p>
         </c:txPr>
         <c:crossAx val="2094734552"/>
         <c:crosses val="autoZero"/>
         <c:auto val="1"/>
         <c:lblAlgn val="ctr"/>
+        <c:lblOffset val="100"/>
         <c:noMultiLvlLbl val="1"/>
       </c:catAx>
       <c:valAx>
@@ -316,7 +333,7 @@
         <c:axPos val="l"/>
         <c:majorGridlines>
           <c:spPr>
-            <a:ln w="12700" cap="flat">
+            <a:ln w="12700" cap="flat" cmpd="sng" algn="ctr">
               <a:solidFill>
                 <a:srgbClr val="E5E9ED"/>
               </a:solidFill>
@@ -330,7 +347,7 @@
         <c:minorTickMark val="none"/>
         <c:tickLblPos val="nextTo"/>
         <c:spPr>
-          <a:ln w="12700" cap="flat">
+          <a:ln w="12700" cap="flat" cmpd="sng" algn="ctr">
             <a:solidFill>
               <a:srgbClr val="888888"/>
             </a:solidFill>
@@ -339,18 +356,19 @@
           </a:ln>
         </c:spPr>
         <c:txPr>
-          <a:bodyPr/>
+          <a:bodyPr rot="-60000000" spcFirstLastPara="0" vertOverflow="ellipsis" vert="horz" wrap="square" anchor="ctr" anchorCtr="1"/>
           <a:lstStyle/>
           <a:p>
             <a:pPr>
-              <a:defRPr sz="1200" b="0" i="0" u="none" strike="noStrike">
+              <a:defRPr lang="en-US" sz="1200" b="0" i="0" u="none" strike="noStrike" kern="1200" baseline="0">
                 <a:solidFill>
                   <a:srgbClr val="16253D"/>
                 </a:solidFill>
-                <a:latin typeface="Arial"/>
+                <a:latin typeface="Arial" panose="020B0604020202090204"/>
+                <a:ea typeface="+mn-ea"/>
+                <a:cs typeface="+mn-cs"/>
               </a:defRPr>
             </a:pPr>
-            <a:endParaRPr lang="en-US"/>
           </a:p>
         </c:txPr>
         <c:crossAx val="2094734554"/>
@@ -367,6 +385,12 @@
     </c:plotArea>
     <c:plotVisOnly val="1"/>
     <c:dispBlanksAs val="span"/>
+    <c:showDLblsOverMax val="0"/>
+    <c:extLst>
+      <c:ext uri="{0b15fc19-7d7d-44ad-8c2d-2c3a37ce22c3}">
+        <chartProps xmlns="https://web.wps.cn/et/2018/main" chartId="{83b546af-dff8-476c-83b6-deff69499968}"/>
+      </c:ext>
+    </c:extLst>
   </c:chart>
   <c:spPr>
     <a:noFill/>
@@ -375,6 +399,15 @@
     </a:ln>
     <a:effectLst/>
   </c:spPr>
+  <c:txPr>
+    <a:bodyPr/>
+    <a:lstStyle/>
+    <a:p>
+      <a:pPr>
+        <a:defRPr lang="en-US"/>
+      </a:pPr>
+    </a:p>
+  </c:txPr>
   <c:externalData r:id="rId1">
     <c:autoUpdate val="0"/>
   </c:externalData>
@@ -384,20 +417,31 @@
 <file path=ppt/charts/chart2.xml><?xml version="1.0" encoding="utf-8"?>
 <c:chartSpace xmlns:c="http://schemas.openxmlformats.org/drawingml/2006/chart" xmlns:a="http://schemas.openxmlformats.org/drawingml/2006/main" xmlns:r="http://schemas.openxmlformats.org/officeDocument/2006/relationships">
   <c:date1904 val="0"/>
+  <c:lang val="zh-CN"/>
   <c:roundedCorners val="1"/>
+  <mc:AlternateContent xmlns:mc="http://schemas.openxmlformats.org/markup-compatibility/2006">
+    <mc:Choice xmlns:c14="http://schemas.microsoft.com/office/drawing/2007/8/2/chart" Requires="c14">
+      <c14:style val="102"/>
+    </mc:Choice>
+    <mc:Fallback>
+      <c:style val="2"/>
+    </mc:Fallback>
+  </mc:AlternateContent>
   <c:chart>
     <c:title>
       <c:tx>
         <c:rich>
-          <a:bodyPr/>
+          <a:bodyPr rot="0" spcFirstLastPara="0" vertOverflow="ellipsis" vert="horz" wrap="square" anchor="ctr" anchorCtr="1"/>
           <a:lstStyle/>
           <a:p>
             <a:pPr>
-              <a:defRPr sz="1200" b="0" i="0" u="none" strike="noStrike">
+              <a:defRPr lang="en-US" sz="1200" b="0" i="0" u="none" strike="noStrike" kern="1200" baseline="0">
                 <a:solidFill>
                   <a:srgbClr val="000000"/>
                 </a:solidFill>
-                <a:latin typeface="Arial"/>
+                <a:latin typeface="Arial" panose="020B0604020202090204"/>
+                <a:ea typeface="+mn-ea"/>
+                <a:cs typeface="+mn-cs"/>
               </a:defRPr>
             </a:pPr>
             <a:r>
@@ -405,10 +449,16 @@
                 <a:solidFill>
                   <a:srgbClr val="000000"/>
                 </a:solidFill>
-                <a:latin typeface="Arial"/>
+                <a:latin typeface="Arial" panose="020B0604020202090204"/>
               </a:rPr>
               <a:t>QLoRA/DPO ablation — final eval loss (Qwen2.5-1.5B)</a:t>
             </a:r>
+            <a:endParaRPr sz="1200" b="0" i="0" u="none" strike="noStrike">
+              <a:solidFill>
+                <a:srgbClr val="000000"/>
+              </a:solidFill>
+              <a:latin typeface="Arial" panose="020B0604020202090204"/>
+            </a:endParaRPr>
           </a:p>
         </c:rich>
       </c:tx>
@@ -443,30 +493,6 @@
             <a:effectLst/>
           </c:spPr>
           <c:invertIfNegative val="0"/>
-          <c:dLbls>
-            <c:numFmt formatCode="0.0000" sourceLinked="0"/>
-            <c:txPr>
-              <a:bodyPr/>
-              <a:lstStyle/>
-              <a:p>
-                <a:pPr>
-                  <a:defRPr b="0" i="0" strike="noStrike" sz="1000" u="none">
-                    <a:solidFill>
-                      <a:srgbClr val="000000"/>
-                    </a:solidFill>
-                    <a:latin typeface="Arial"/>
-                  </a:defRPr>
-                </a:pPr>
-              </a:p>
-            </c:txPr>
-            <c:showLegendKey val="0"/>
-            <c:showVal val="1"/>
-            <c:showCatName val="0"/>
-            <c:showSerName val="0"/>
-            <c:showPercent val="0"/>
-            <c:showBubbleSize val="0"/>
-            <c:showLeaderLines val="0"/>
-          </c:dLbls>
           <c:dPt>
             <c:idx val="0"/>
             <c:invertIfNegative val="0"/>
@@ -500,24 +526,63 @@
               <a:effectLst/>
             </c:spPr>
           </c:dPt>
+          <c:dLbls>
+            <c:numFmt formatCode="0.0000" sourceLinked="0"/>
+            <c:spPr>
+              <a:noFill/>
+              <a:ln>
+                <a:noFill/>
+              </a:ln>
+              <a:effectLst/>
+            </c:spPr>
+            <c:txPr>
+              <a:bodyPr rot="0" spcFirstLastPara="0" vertOverflow="ellipsis" vert="horz" wrap="square" lIns="38100" tIns="19050" rIns="38100" bIns="19050" anchor="ctr" anchorCtr="1"/>
+              <a:lstStyle/>
+              <a:p>
+                <a:pPr>
+                  <a:defRPr lang="en-US" sz="1000" b="0" i="0" u="none" strike="noStrike" kern="1200" baseline="0">
+                    <a:solidFill>
+                      <a:srgbClr val="000000"/>
+                    </a:solidFill>
+                    <a:latin typeface="Arial" panose="020B0604020202090204"/>
+                    <a:ea typeface="+mn-ea"/>
+                    <a:cs typeface="+mn-cs"/>
+                  </a:defRPr>
+                </a:pPr>
+              </a:p>
+            </c:txPr>
+            <c:dLblPos val="outEnd"/>
+            <c:showLegendKey val="0"/>
+            <c:showVal val="1"/>
+            <c:showCatName val="0"/>
+            <c:showSerName val="0"/>
+            <c:showPercent val="0"/>
+            <c:showBubbleSize val="0"/>
+            <c:showLeaderLines val="0"/>
+            <c:extLst>
+              <c:ext xmlns:c15="http://schemas.microsoft.com/office/drawing/2012/chart" uri="{CE6537A1-D6FC-4f65-9D91-7224C49458BB}">
+                <c15:layout/>
+                <c15:showLeaderLines val="0"/>
+                <c15:leaderLines/>
+              </c:ext>
+            </c:extLst>
+          </c:dLbls>
           <c:cat>
-            <c:multiLvlStrRef>
+            <c:strRef>
               <c:f>Sheet1!$A$2:$A$4</c:f>
-              <c:multiLvlStrCache>
+              <c:strCache>
                 <c:ptCount val="3"/>
-                <c:lvl>
-                  <c:pt idx="0">
-                    <c:v>A (r=8, lr=2e-4)</c:v>
-                  </c:pt>
-                  <c:pt idx="1">
-                    <c:v>B (r=16, lr=2e-4) — selected</c:v>
-                  </c:pt>
-                  <c:pt idx="2">
-                    <c:v>C (r=16, lr=1e-4)</c:v>
-                  </c:pt>
-                </c:lvl>
-              </c:multiLvlStrCache>
-            </c:multiLvlStrRef>
+                <c:pt idx="0">
+                  <c:v>A (r=8, lr=2e-4)</c:v>
+                </c:pt>
+                <c:pt idx="1">
+                  <c:v>B (r=16, lr=2e-4) — selected</c:v>
+                </c:pt>
+                <c:pt idx="2">
+                  <c:v>C (r=16, lr=1e-4)</c:v>
+                </c:pt>
+              </c:strCache>
+            </c:strRef>
           </c:cat>
           <c:val>
             <c:numRef>
@@ -539,34 +604,17 @@
           </c:val>
         </c:ser>
         <c:dLbls>
-          <c:numFmt formatCode="0.0000" sourceLinked="0"/>
-          <c:txPr>
-            <a:bodyPr/>
-            <a:lstStyle/>
-            <a:p>
-              <a:pPr>
-                <a:defRPr b="0" i="0" strike="noStrike" sz="1000" u="none">
-                  <a:solidFill>
-                    <a:srgbClr val="000000"/>
-                  </a:solidFill>
-                  <a:latin typeface="Arial"/>
-                </a:defRPr>
-              </a:pPr>
-            </a:p>
-          </c:txPr>
           <c:showLegendKey val="0"/>
           <c:showVal val="1"/>
           <c:showCatName val="0"/>
           <c:showSerName val="0"/>
           <c:showPercent val="0"/>
           <c:showBubbleSize val="0"/>
-          <c:showLeaderLines val="0"/>
         </c:dLbls>
         <c:gapWidth val="150"/>
         <c:overlap val="0"/>
         <c:axId val="2094734554"/>
         <c:axId val="2094734552"/>
-        <c:axId val="2094734556"/>
       </c:barChart>
       <c:catAx>
         <c:axId val="2094734554"/>
@@ -580,7 +628,7 @@
         <c:minorTickMark val="none"/>
         <c:tickLblPos val="low"/>
         <c:spPr>
-          <a:ln w="12700" cap="flat">
+          <a:ln w="12700" cap="flat" cmpd="sng" algn="ctr">
             <a:solidFill>
               <a:srgbClr val="888888"/>
             </a:solidFill>
@@ -589,24 +637,26 @@
           </a:ln>
         </c:spPr>
         <c:txPr>
-          <a:bodyPr/>
+          <a:bodyPr rot="-60000000" spcFirstLastPara="0" vertOverflow="ellipsis" vert="horz" wrap="square" anchor="ctr" anchorCtr="1"/>
           <a:lstStyle/>
           <a:p>
             <a:pPr>
-              <a:defRPr sz="950" b="0" i="0" u="none" strike="noStrike">
+              <a:defRPr lang="en-US" sz="950" b="0" i="0" u="none" strike="noStrike" kern="1200" baseline="0">
                 <a:solidFill>
                   <a:srgbClr val="16253D"/>
                 </a:solidFill>
-                <a:latin typeface="Arial"/>
+                <a:latin typeface="Arial" panose="020B0604020202090204"/>
+                <a:ea typeface="+mn-ea"/>
+                <a:cs typeface="+mn-cs"/>
               </a:defRPr>
             </a:pPr>
-            <a:endParaRPr lang="en-US"/>
           </a:p>
         </c:txPr>
         <c:crossAx val="2094734552"/>
         <c:crosses val="autoZero"/>
         <c:auto val="1"/>
         <c:lblAlgn val="ctr"/>
+        <c:lblOffset val="100"/>
         <c:noMultiLvlLbl val="1"/>
       </c:catAx>
       <c:valAx>
@@ -618,7 +668,7 @@
         <c:axPos val="l"/>
         <c:majorGridlines>
           <c:spPr>
-            <a:ln w="12700" cap="flat">
+            <a:ln w="12700" cap="flat" cmpd="sng" algn="ctr">
               <a:solidFill>
                 <a:srgbClr val="E5E9ED"/>
               </a:solidFill>
@@ -632,7 +682,7 @@
         <c:minorTickMark val="none"/>
         <c:tickLblPos val="nextTo"/>
         <c:spPr>
-          <a:ln w="12700" cap="flat">
+          <a:ln w="12700" cap="flat" cmpd="sng" algn="ctr">
             <a:solidFill>
               <a:srgbClr val="888888"/>
             </a:solidFill>
@@ -641,18 +691,19 @@
           </a:ln>
         </c:spPr>
         <c:txPr>
-          <a:bodyPr/>
+          <a:bodyPr rot="-60000000" spcFirstLastPara="0" vertOverflow="ellipsis" vert="horz" wrap="square" anchor="ctr" anchorCtr="1"/>
           <a:lstStyle/>
           <a:p>
             <a:pPr>
-              <a:defRPr sz="1200" b="0" i="0" u="none" strike="noStrike">
+              <a:defRPr lang="en-US" sz="1200" b="0" i="0" u="none" strike="noStrike" kern="1200" baseline="0">
                 <a:solidFill>
                   <a:srgbClr val="16253D"/>
                 </a:solidFill>
-                <a:latin typeface="Arial"/>
+                <a:latin typeface="Arial" panose="020B0604020202090204"/>
+                <a:ea typeface="+mn-ea"/>
+                <a:cs typeface="+mn-cs"/>
               </a:defRPr>
             </a:pPr>
-            <a:endParaRPr lang="en-US"/>
           </a:p>
         </c:txPr>
         <c:crossAx val="2094734554"/>
@@ -669,6 +720,12 @@
     </c:plotArea>
     <c:plotVisOnly val="1"/>
     <c:dispBlanksAs val="span"/>
+    <c:showDLblsOverMax val="0"/>
+    <c:extLst>
+      <c:ext uri="{0b15fc19-7d7d-44ad-8c2d-2c3a37ce22c3}">
+        <chartProps xmlns="https://web.wps.cn/et/2018/main" chartId="{03fcf110-406f-4903-9715-19228d5610e2}"/>
+      </c:ext>
+    </c:extLst>
   </c:chart>
   <c:spPr>
     <a:noFill/>
@@ -677,6 +734,15 @@
     </a:ln>
     <a:effectLst/>
   </c:spPr>
+  <c:txPr>
+    <a:bodyPr/>
+    <a:lstStyle/>
+    <a:p>
+      <a:pPr>
+        <a:defRPr lang="en-US"/>
+      </a:pPr>
+    </a:p>
+  </c:txPr>
   <c:externalData r:id="rId1">
     <c:autoUpdate val="0"/>
   </c:externalData>
@@ -686,20 +752,31 @@
 <file path=ppt/charts/chart3.xml><?xml version="1.0" encoding="utf-8"?>
 <c:chartSpace xmlns:c="http://schemas.openxmlformats.org/drawingml/2006/chart" xmlns:a="http://schemas.openxmlformats.org/drawingml/2006/main" xmlns:r="http://schemas.openxmlformats.org/officeDocument/2006/relationships">
   <c:date1904 val="0"/>
+  <c:lang val="zh-CN"/>
   <c:roundedCorners val="1"/>
+  <mc:AlternateContent xmlns:mc="http://schemas.openxmlformats.org/markup-compatibility/2006">
+    <mc:Choice xmlns:c14="http://schemas.microsoft.com/office/drawing/2007/8/2/chart" Requires="c14">
+      <c14:style val="102"/>
+    </mc:Choice>
+    <mc:Fallback>
+      <c:style val="2"/>
+    </mc:Fallback>
+  </mc:AlternateContent>
   <c:chart>
     <c:title>
       <c:tx>
         <c:rich>
-          <a:bodyPr/>
+          <a:bodyPr rot="0" spcFirstLastPara="0" vertOverflow="ellipsis" vert="horz" wrap="square" anchor="ctr" anchorCtr="1"/>
           <a:lstStyle/>
           <a:p>
             <a:pPr>
-              <a:defRPr sz="1200" b="0" i="0" u="none" strike="noStrike">
+              <a:defRPr lang="en-US" sz="1200" b="0" i="0" u="none" strike="noStrike" kern="1200" baseline="0">
                 <a:solidFill>
                   <a:srgbClr val="000000"/>
                 </a:solidFill>
-                <a:latin typeface="Arial"/>
+                <a:latin typeface="Arial" panose="020B0604020202090204"/>
+                <a:ea typeface="+mn-ea"/>
+                <a:cs typeface="+mn-cs"/>
               </a:defRPr>
             </a:pPr>
             <a:r>
@@ -707,10 +784,16 @@
                 <a:solidFill>
                   <a:srgbClr val="000000"/>
                 </a:solidFill>
-                <a:latin typeface="Arial"/>
+                <a:latin typeface="Arial" panose="020B0604020202090204"/>
               </a:rPr>
               <a:t>Precision vs. recall by category</a:t>
             </a:r>
+            <a:endParaRPr sz="1200" b="0" i="0" u="none" strike="noStrike">
+              <a:solidFill>
+                <a:srgbClr val="000000"/>
+              </a:solidFill>
+              <a:latin typeface="Arial" panose="020B0604020202090204"/>
+            </a:endParaRPr>
           </a:p>
         </c:rich>
       </c:tx>
@@ -747,20 +830,30 @@
           <c:invertIfNegative val="0"/>
           <c:dLbls>
             <c:numFmt formatCode="0.00" sourceLinked="0"/>
+            <c:spPr>
+              <a:noFill/>
+              <a:ln>
+                <a:noFill/>
+              </a:ln>
+              <a:effectLst/>
+            </c:spPr>
             <c:txPr>
-              <a:bodyPr/>
+              <a:bodyPr rot="0" spcFirstLastPara="0" vertOverflow="ellipsis" vert="horz" wrap="square" lIns="38100" tIns="19050" rIns="38100" bIns="19050" anchor="ctr" anchorCtr="1"/>
               <a:lstStyle/>
               <a:p>
                 <a:pPr>
-                  <a:defRPr b="0" i="0" strike="noStrike" sz="800" u="none">
+                  <a:defRPr lang="en-US" sz="800" b="0" i="0" u="none" strike="noStrike" kern="1200" baseline="0">
                     <a:solidFill>
                       <a:srgbClr val="000000"/>
                     </a:solidFill>
-                    <a:latin typeface="Arial"/>
+                    <a:latin typeface="Arial" panose="020B0604020202090204"/>
+                    <a:ea typeface="+mn-ea"/>
+                    <a:cs typeface="+mn-cs"/>
                   </a:defRPr>
                 </a:pPr>
               </a:p>
             </c:txPr>
+            <c:dLblPos val="outEnd"/>
             <c:showLegendKey val="0"/>
             <c:showVal val="1"/>
             <c:showCatName val="0"/>
@@ -768,25 +861,30 @@
             <c:showPercent val="0"/>
             <c:showBubbleSize val="0"/>
             <c:showLeaderLines val="0"/>
+            <c:extLst>
+              <c:ext xmlns:c15="http://schemas.microsoft.com/office/drawing/2012/chart" uri="{CE6537A1-D6FC-4f65-9D91-7224C49458BB}">
+                <c15:layout/>
+                <c15:showLeaderLines val="0"/>
+                <c15:leaderLines/>
+              </c:ext>
+            </c:extLst>
           </c:dLbls>
           <c:cat>
-            <c:multiLvlStrRef>
+            <c:strRef>
               <c:f>Sheet1!$A$2:$A$4</c:f>
-              <c:multiLvlStrCache>
+              <c:strCache>
                 <c:ptCount val="3"/>
-                <c:lvl>
-                  <c:pt idx="0">
-                    <c:v>ROUTINE</c:v>
-                  </c:pt>
-                  <c:pt idx="1">
-                    <c:v>MILD_DISTRESS</c:v>
-                  </c:pt>
-                  <c:pt idx="2">
-                    <c:v>ESCALATE</c:v>
-                  </c:pt>
-                </c:lvl>
-              </c:multiLvlStrCache>
-            </c:multiLvlStrRef>
+                <c:pt idx="0">
+                  <c:v>ROUTINE</c:v>
+                </c:pt>
+                <c:pt idx="1">
+                  <c:v>MILD_DISTRESS</c:v>
+                </c:pt>
+                <c:pt idx="2">
+                  <c:v>ESCALATE</c:v>
+                </c:pt>
+              </c:strCache>
+            </c:strRef>
           </c:cat>
           <c:val>
             <c:numRef>
@@ -830,20 +928,30 @@
           <c:invertIfNegative val="0"/>
           <c:dLbls>
             <c:numFmt formatCode="0.00" sourceLinked="0"/>
+            <c:spPr>
+              <a:noFill/>
+              <a:ln>
+                <a:noFill/>
+              </a:ln>
+              <a:effectLst/>
+            </c:spPr>
             <c:txPr>
-              <a:bodyPr/>
+              <a:bodyPr rot="0" spcFirstLastPara="0" vertOverflow="ellipsis" vert="horz" wrap="square" lIns="38100" tIns="19050" rIns="38100" bIns="19050" anchor="ctr" anchorCtr="1"/>
               <a:lstStyle/>
               <a:p>
                 <a:pPr>
-                  <a:defRPr b="0" i="0" strike="noStrike" sz="800" u="none">
+                  <a:defRPr lang="en-US" sz="800" b="0" i="0" u="none" strike="noStrike" kern="1200" baseline="0">
                     <a:solidFill>
                       <a:srgbClr val="000000"/>
                     </a:solidFill>
-                    <a:latin typeface="Arial"/>
+                    <a:latin typeface="Arial" panose="020B0604020202090204"/>
+                    <a:ea typeface="+mn-ea"/>
+                    <a:cs typeface="+mn-cs"/>
                   </a:defRPr>
                 </a:pPr>
               </a:p>
             </c:txPr>
+            <c:dLblPos val="outEnd"/>
             <c:showLegendKey val="0"/>
             <c:showVal val="1"/>
             <c:showCatName val="0"/>
@@ -851,25 +959,30 @@
             <c:showPercent val="0"/>
             <c:showBubbleSize val="0"/>
             <c:showLeaderLines val="0"/>
+            <c:extLst>
+              <c:ext xmlns:c15="http://schemas.microsoft.com/office/drawing/2012/chart" uri="{CE6537A1-D6FC-4f65-9D91-7224C49458BB}">
+                <c15:layout/>
+                <c15:showLeaderLines val="0"/>
+                <c15:leaderLines/>
+              </c:ext>
+            </c:extLst>
           </c:dLbls>
           <c:cat>
-            <c:multiLvlStrRef>
+            <c:strRef>
               <c:f>Sheet1!$A$2:$A$4</c:f>
-              <c:multiLvlStrCache>
+              <c:strCache>
                 <c:ptCount val="3"/>
-                <c:lvl>
-                  <c:pt idx="0">
-                    <c:v>ROUTINE</c:v>
-                  </c:pt>
-                  <c:pt idx="1">
-                    <c:v>MILD_DISTRESS</c:v>
-                  </c:pt>
-                  <c:pt idx="2">
-                    <c:v>ESCALATE</c:v>
-                  </c:pt>
-                </c:lvl>
-              </c:multiLvlStrCache>
-            </c:multiLvlStrRef>
+                <c:pt idx="0">
+                  <c:v>ROUTINE</c:v>
+                </c:pt>
+                <c:pt idx="1">
+                  <c:v>MILD_DISTRESS</c:v>
+                </c:pt>
+                <c:pt idx="2">
+                  <c:v>ESCALATE</c:v>
+                </c:pt>
+              </c:strCache>
+            </c:strRef>
           </c:cat>
           <c:val>
             <c:numRef>
@@ -891,34 +1004,17 @@
           </c:val>
         </c:ser>
         <c:dLbls>
-          <c:numFmt formatCode="0.00" sourceLinked="0"/>
-          <c:txPr>
-            <a:bodyPr/>
-            <a:lstStyle/>
-            <a:p>
-              <a:pPr>
-                <a:defRPr b="0" i="0" strike="noStrike" sz="800" u="none">
-                  <a:solidFill>
-                    <a:srgbClr val="000000"/>
-                  </a:solidFill>
-                  <a:latin typeface="Arial"/>
-                </a:defRPr>
-              </a:pPr>
-            </a:p>
-          </c:txPr>
           <c:showLegendKey val="0"/>
           <c:showVal val="1"/>
           <c:showCatName val="0"/>
           <c:showSerName val="0"/>
           <c:showPercent val="0"/>
           <c:showBubbleSize val="0"/>
-          <c:showLeaderLines val="0"/>
         </c:dLbls>
         <c:gapWidth val="150"/>
         <c:overlap val="0"/>
         <c:axId val="2094734554"/>
         <c:axId val="2094734552"/>
-        <c:axId val="2094734556"/>
       </c:barChart>
       <c:catAx>
         <c:axId val="2094734554"/>
@@ -932,7 +1028,7 @@
         <c:minorTickMark val="none"/>
         <c:tickLblPos val="low"/>
         <c:spPr>
-          <a:ln w="12700" cap="flat">
+          <a:ln w="12700" cap="flat" cmpd="sng" algn="ctr">
             <a:solidFill>
               <a:srgbClr val="888888"/>
             </a:solidFill>
@@ -941,24 +1037,26 @@
           </a:ln>
         </c:spPr>
         <c:txPr>
-          <a:bodyPr/>
+          <a:bodyPr rot="-60000000" spcFirstLastPara="0" vertOverflow="ellipsis" vert="horz" wrap="square" anchor="ctr" anchorCtr="1"/>
           <a:lstStyle/>
           <a:p>
             <a:pPr>
-              <a:defRPr sz="900" b="0" i="0" u="none" strike="noStrike">
+              <a:defRPr lang="en-US" sz="900" b="0" i="0" u="none" strike="noStrike" kern="1200" baseline="0">
                 <a:solidFill>
                   <a:srgbClr val="16253D"/>
                 </a:solidFill>
-                <a:latin typeface="Arial"/>
+                <a:latin typeface="Arial" panose="020B0604020202090204"/>
+                <a:ea typeface="+mn-ea"/>
+                <a:cs typeface="+mn-cs"/>
               </a:defRPr>
             </a:pPr>
-            <a:endParaRPr lang="en-US"/>
           </a:p>
         </c:txPr>
         <c:crossAx val="2094734552"/>
         <c:crosses val="autoZero"/>
         <c:auto val="1"/>
         <c:lblAlgn val="ctr"/>
+        <c:lblOffset val="100"/>
         <c:noMultiLvlLbl val="1"/>
       </c:catAx>
       <c:valAx>
@@ -970,7 +1068,7 @@
         <c:axPos val="l"/>
         <c:majorGridlines>
           <c:spPr>
-            <a:ln w="12700" cap="flat">
+            <a:ln w="12700" cap="flat" cmpd="sng" algn="ctr">
               <a:solidFill>
                 <a:srgbClr val="E5E9ED"/>
               </a:solidFill>
@@ -984,7 +1082,7 @@
         <c:minorTickMark val="none"/>
         <c:tickLblPos val="nextTo"/>
         <c:spPr>
-          <a:ln w="12700" cap="flat">
+          <a:ln w="12700" cap="flat" cmpd="sng" algn="ctr">
             <a:solidFill>
               <a:srgbClr val="888888"/>
             </a:solidFill>
@@ -993,18 +1091,19 @@
           </a:ln>
         </c:spPr>
         <c:txPr>
-          <a:bodyPr/>
+          <a:bodyPr rot="-60000000" spcFirstLastPara="0" vertOverflow="ellipsis" vert="horz" wrap="square" anchor="ctr" anchorCtr="1"/>
           <a:lstStyle/>
           <a:p>
             <a:pPr>
-              <a:defRPr sz="1200" b="0" i="0" u="none" strike="noStrike">
+              <a:defRPr lang="en-US" sz="1200" b="0" i="0" u="none" strike="noStrike" kern="1200" baseline="0">
                 <a:solidFill>
                   <a:srgbClr val="16253D"/>
                 </a:solidFill>
-                <a:latin typeface="Arial"/>
+                <a:latin typeface="Arial" panose="020B0604020202090204"/>
+                <a:ea typeface="+mn-ea"/>
+                <a:cs typeface="+mn-cs"/>
               </a:defRPr>
             </a:pPr>
-            <a:endParaRPr lang="en-US"/>
           </a:p>
         </c:txPr>
         <c:crossAx val="2094734554"/>
@@ -1021,20 +1120,33 @@
     </c:plotArea>
     <c:legend>
       <c:legendPos val="b"/>
+      <c:layout/>
       <c:overlay val="0"/>
       <c:txPr>
-        <a:bodyPr/>
+        <a:bodyPr rot="0" spcFirstLastPara="0" vertOverflow="ellipsis" vert="horz" wrap="square" anchor="ctr" anchorCtr="1"/>
         <a:lstStyle/>
         <a:p>
           <a:pPr>
-            <a:defRPr sz="1000">      </a:defRPr>
+            <a:defRPr lang="en-US" sz="1000" b="0" i="0" u="none" strike="noStrike" kern="1200" baseline="0">
+              <a:solidFill>
+                <a:schemeClr val="tx1"/>
+              </a:solidFill>
+              <a:latin typeface="+mn-lt"/>
+              <a:ea typeface="+mn-ea"/>
+              <a:cs typeface="+mn-cs"/>
+            </a:defRPr>
           </a:pPr>
-          <a:endParaRPr lang="en-US"/>
         </a:p>
       </c:txPr>
     </c:legend>
     <c:plotVisOnly val="1"/>
     <c:dispBlanksAs val="span"/>
+    <c:showDLblsOverMax val="0"/>
+    <c:extLst>
+      <c:ext uri="{0b15fc19-7d7d-44ad-8c2d-2c3a37ce22c3}">
+        <chartProps xmlns="https://web.wps.cn/et/2018/main" chartId="{ecf3e243-1583-4976-8e07-5099f14eb19b}"/>
+      </c:ext>
+    </c:extLst>
   </c:chart>
   <c:spPr>
     <a:noFill/>
@@ -1043,6 +1155,15 @@
     </a:ln>
     <a:effectLst/>
   </c:spPr>
+  <c:txPr>
+    <a:bodyPr/>
+    <a:lstStyle/>
+    <a:p>
+      <a:pPr>
+        <a:defRPr lang="en-US"/>
+      </a:pPr>
+    </a:p>
+  </c:txPr>
   <c:externalData r:id="rId1">
     <c:autoUpdate val="0"/>
   </c:externalData>
@@ -1131,7 +1252,6 @@
           <a:p>
             <a:fld id="{5282F153-3F37-0F45-9E97-73ACFA13230C}" type="datetimeFigureOut">
               <a:rPr lang="en-US"/>
-              <a:t>7/23/19</a:t>
             </a:fld>
             <a:endParaRPr lang="en-US"/>
           </a:p>
@@ -1198,6 +1318,7 @@
               <a:rPr lang="en-US"/>
               <a:t>Click to edit Master text styles</a:t>
             </a:r>
+            <a:endParaRPr lang="en-US"/>
           </a:p>
           <a:p>
             <a:pPr lvl="1"/>
@@ -1205,6 +1326,7 @@
               <a:rPr lang="en-US"/>
               <a:t>Second level</a:t>
             </a:r>
+            <a:endParaRPr lang="en-US"/>
           </a:p>
           <a:p>
             <a:pPr lvl="2"/>
@@ -1212,6 +1334,7 @@
               <a:rPr lang="en-US"/>
               <a:t>Third level</a:t>
             </a:r>
+            <a:endParaRPr lang="en-US"/>
           </a:p>
           <a:p>
             <a:pPr lvl="3"/>
@@ -1219,6 +1342,7 @@
               <a:rPr lang="en-US"/>
               <a:t>Fourth level</a:t>
             </a:r>
+            <a:endParaRPr lang="en-US"/>
           </a:p>
           <a:p>
             <a:pPr lvl="4"/>
@@ -1226,6 +1350,7 @@
               <a:rPr lang="en-US"/>
               <a:t>Fifth level</a:t>
             </a:r>
+            <a:endParaRPr lang="en-US"/>
           </a:p>
         </p:txBody>
       </p:sp>
@@ -1289,18 +1414,12 @@
           <a:p>
             <a:fld id="{CE5E9CC1-C706-0F49-92D6-E571CC5EEA8F}" type="slidenum">
               <a:rPr lang="en-US"/>
-              <a:t>‹#›</a:t>
             </a:fld>
             <a:endParaRPr lang="en-US"/>
           </a:p>
         </p:txBody>
       </p:sp>
     </p:spTree>
-    <p:extLst>
-      <p:ext uri="{BB962C8B-B14F-4D97-AF65-F5344CB8AC3E}">
-        <p14:creationId xmlns:p14="http://schemas.microsoft.com/office/powerpoint/2010/main" val="1024086991"/>
-      </p:ext>
-    </p:extLst>
   </p:cSld>
   <p:clrMap bg1="lt1" tx1="dk1" bg2="lt2" tx2="dk2" accent1="accent1" accent2="accent2" accent3="accent3" accent4="accent4" accent5="accent5" accent6="accent6" hlink="hlink" folHlink="folHlink"/>
   <p:notesStyle>
@@ -1442,10 +1561,6 @@
           <a:bodyPr/>
           <a:lstStyle/>
           <a:p>
-            <a:r>
-              <a:rPr lang="en-US" dirty="0"/>
-              <a:t/>
-            </a:r>
             <a:endParaRPr lang="en-US" dirty="0"/>
           </a:p>
         </p:txBody>
@@ -1467,18 +1582,12 @@
           <a:p>
             <a:fld id="{F7021451-1387-4CA6-816F-3879F97B5CBC}" type="slidenum">
               <a:rPr lang="en-US"/>
-              <a:t>1</a:t>
             </a:fld>
             <a:endParaRPr lang="en-US"/>
           </a:p>
         </p:txBody>
       </p:sp>
     </p:spTree>
-    <p:extLst>
-      <p:ext uri="{BB962C8B-B14F-4D97-AF65-F5344CB8AC3E}">
-        <p14:creationId xmlns:p14="http://schemas.microsoft.com/office/powerpoint/2010/main" val="1024086991"/>
-      </p:ext>
-    </p:extLst>
   </p:cSld>
   <p:clrMapOvr>
     <a:masterClrMapping/>
@@ -1530,10 +1639,6 @@
           <a:bodyPr/>
           <a:lstStyle/>
           <a:p>
-            <a:r>
-              <a:rPr lang="en-US" dirty="0"/>
-              <a:t/>
-            </a:r>
             <a:endParaRPr lang="en-US" dirty="0"/>
           </a:p>
         </p:txBody>
@@ -1555,18 +1660,12 @@
           <a:p>
             <a:fld id="{F7021451-1387-4CA6-816F-3879F97B5CBC}" type="slidenum">
               <a:rPr lang="en-US"/>
-              <a:t>10</a:t>
             </a:fld>
             <a:endParaRPr lang="en-US"/>
           </a:p>
         </p:txBody>
       </p:sp>
     </p:spTree>
-    <p:extLst>
-      <p:ext uri="{BB962C8B-B14F-4D97-AF65-F5344CB8AC3E}">
-        <p14:creationId xmlns:p14="http://schemas.microsoft.com/office/powerpoint/2010/main" val="1024086991"/>
-      </p:ext>
-    </p:extLst>
   </p:cSld>
   <p:clrMapOvr>
     <a:masterClrMapping/>
@@ -1618,10 +1717,6 @@
           <a:bodyPr/>
           <a:lstStyle/>
           <a:p>
-            <a:r>
-              <a:rPr lang="en-US" dirty="0"/>
-              <a:t/>
-            </a:r>
             <a:endParaRPr lang="en-US" dirty="0"/>
           </a:p>
         </p:txBody>
@@ -1643,18 +1738,12 @@
           <a:p>
             <a:fld id="{F7021451-1387-4CA6-816F-3879F97B5CBC}" type="slidenum">
               <a:rPr lang="en-US"/>
-              <a:t>11</a:t>
             </a:fld>
             <a:endParaRPr lang="en-US"/>
           </a:p>
         </p:txBody>
       </p:sp>
     </p:spTree>
-    <p:extLst>
-      <p:ext uri="{BB962C8B-B14F-4D97-AF65-F5344CB8AC3E}">
-        <p14:creationId xmlns:p14="http://schemas.microsoft.com/office/powerpoint/2010/main" val="1024086991"/>
-      </p:ext>
-    </p:extLst>
   </p:cSld>
   <p:clrMapOvr>
     <a:masterClrMapping/>
@@ -1706,10 +1795,6 @@
           <a:bodyPr/>
           <a:lstStyle/>
           <a:p>
-            <a:r>
-              <a:rPr lang="en-US" dirty="0"/>
-              <a:t/>
-            </a:r>
             <a:endParaRPr lang="en-US" dirty="0"/>
           </a:p>
         </p:txBody>
@@ -1731,18 +1816,12 @@
           <a:p>
             <a:fld id="{F7021451-1387-4CA6-816F-3879F97B5CBC}" type="slidenum">
               <a:rPr lang="en-US"/>
-              <a:t>12</a:t>
             </a:fld>
             <a:endParaRPr lang="en-US"/>
           </a:p>
         </p:txBody>
       </p:sp>
     </p:spTree>
-    <p:extLst>
-      <p:ext uri="{BB962C8B-B14F-4D97-AF65-F5344CB8AC3E}">
-        <p14:creationId xmlns:p14="http://schemas.microsoft.com/office/powerpoint/2010/main" val="1024086991"/>
-      </p:ext>
-    </p:extLst>
   </p:cSld>
   <p:clrMapOvr>
     <a:masterClrMapping/>
@@ -1794,10 +1873,6 @@
           <a:bodyPr/>
           <a:lstStyle/>
           <a:p>
-            <a:r>
-              <a:rPr lang="en-US" dirty="0"/>
-              <a:t/>
-            </a:r>
             <a:endParaRPr lang="en-US" dirty="0"/>
           </a:p>
         </p:txBody>
@@ -1819,18 +1894,12 @@
           <a:p>
             <a:fld id="{F7021451-1387-4CA6-816F-3879F97B5CBC}" type="slidenum">
               <a:rPr lang="en-US"/>
-              <a:t>2</a:t>
             </a:fld>
             <a:endParaRPr lang="en-US"/>
           </a:p>
         </p:txBody>
       </p:sp>
     </p:spTree>
-    <p:extLst>
-      <p:ext uri="{BB962C8B-B14F-4D97-AF65-F5344CB8AC3E}">
-        <p14:creationId xmlns:p14="http://schemas.microsoft.com/office/powerpoint/2010/main" val="1024086991"/>
-      </p:ext>
-    </p:extLst>
   </p:cSld>
   <p:clrMapOvr>
     <a:masterClrMapping/>
@@ -1882,10 +1951,6 @@
           <a:bodyPr/>
           <a:lstStyle/>
           <a:p>
-            <a:r>
-              <a:rPr lang="en-US" dirty="0"/>
-              <a:t/>
-            </a:r>
             <a:endParaRPr lang="en-US" dirty="0"/>
           </a:p>
         </p:txBody>
@@ -1907,18 +1972,12 @@
           <a:p>
             <a:fld id="{F7021451-1387-4CA6-816F-3879F97B5CBC}" type="slidenum">
               <a:rPr lang="en-US"/>
-              <a:t>3</a:t>
             </a:fld>
             <a:endParaRPr lang="en-US"/>
           </a:p>
         </p:txBody>
       </p:sp>
     </p:spTree>
-    <p:extLst>
-      <p:ext uri="{BB962C8B-B14F-4D97-AF65-F5344CB8AC3E}">
-        <p14:creationId xmlns:p14="http://schemas.microsoft.com/office/powerpoint/2010/main" val="1024086991"/>
-      </p:ext>
-    </p:extLst>
   </p:cSld>
   <p:clrMapOvr>
     <a:masterClrMapping/>
@@ -1970,10 +2029,6 @@
           <a:bodyPr/>
           <a:lstStyle/>
           <a:p>
-            <a:r>
-              <a:rPr lang="en-US" dirty="0"/>
-              <a:t/>
-            </a:r>
             <a:endParaRPr lang="en-US" dirty="0"/>
           </a:p>
         </p:txBody>
@@ -1995,18 +2050,12 @@
           <a:p>
             <a:fld id="{F7021451-1387-4CA6-816F-3879F97B5CBC}" type="slidenum">
               <a:rPr lang="en-US"/>
-              <a:t>4</a:t>
             </a:fld>
             <a:endParaRPr lang="en-US"/>
           </a:p>
         </p:txBody>
       </p:sp>
     </p:spTree>
-    <p:extLst>
-      <p:ext uri="{BB962C8B-B14F-4D97-AF65-F5344CB8AC3E}">
-        <p14:creationId xmlns:p14="http://schemas.microsoft.com/office/powerpoint/2010/main" val="1024086991"/>
-      </p:ext>
-    </p:extLst>
   </p:cSld>
   <p:clrMapOvr>
     <a:masterClrMapping/>
@@ -2058,10 +2107,6 @@
           <a:bodyPr/>
           <a:lstStyle/>
           <a:p>
-            <a:r>
-              <a:rPr lang="en-US" dirty="0"/>
-              <a:t/>
-            </a:r>
             <a:endParaRPr lang="en-US" dirty="0"/>
           </a:p>
         </p:txBody>
@@ -2083,18 +2128,12 @@
           <a:p>
             <a:fld id="{F7021451-1387-4CA6-816F-3879F97B5CBC}" type="slidenum">
               <a:rPr lang="en-US"/>
-              <a:t>5</a:t>
             </a:fld>
             <a:endParaRPr lang="en-US"/>
           </a:p>
         </p:txBody>
       </p:sp>
     </p:spTree>
-    <p:extLst>
-      <p:ext uri="{BB962C8B-B14F-4D97-AF65-F5344CB8AC3E}">
-        <p14:creationId xmlns:p14="http://schemas.microsoft.com/office/powerpoint/2010/main" val="1024086991"/>
-      </p:ext>
-    </p:extLst>
   </p:cSld>
   <p:clrMapOvr>
     <a:masterClrMapping/>
@@ -2146,10 +2185,6 @@
           <a:bodyPr/>
           <a:lstStyle/>
           <a:p>
-            <a:r>
-              <a:rPr lang="en-US" dirty="0"/>
-              <a:t/>
-            </a:r>
             <a:endParaRPr lang="en-US" dirty="0"/>
           </a:p>
         </p:txBody>
@@ -2171,18 +2206,12 @@
           <a:p>
             <a:fld id="{F7021451-1387-4CA6-816F-3879F97B5CBC}" type="slidenum">
               <a:rPr lang="en-US"/>
-              <a:t>6</a:t>
             </a:fld>
             <a:endParaRPr lang="en-US"/>
           </a:p>
         </p:txBody>
       </p:sp>
     </p:spTree>
-    <p:extLst>
-      <p:ext uri="{BB962C8B-B14F-4D97-AF65-F5344CB8AC3E}">
-        <p14:creationId xmlns:p14="http://schemas.microsoft.com/office/powerpoint/2010/main" val="1024086991"/>
-      </p:ext>
-    </p:extLst>
   </p:cSld>
   <p:clrMapOvr>
     <a:masterClrMapping/>
@@ -2234,10 +2263,6 @@
           <a:bodyPr/>
           <a:lstStyle/>
           <a:p>
-            <a:r>
-              <a:rPr lang="en-US" dirty="0"/>
-              <a:t/>
-            </a:r>
             <a:endParaRPr lang="en-US" dirty="0"/>
           </a:p>
         </p:txBody>
@@ -2259,18 +2284,12 @@
           <a:p>
             <a:fld id="{F7021451-1387-4CA6-816F-3879F97B5CBC}" type="slidenum">
               <a:rPr lang="en-US"/>
-              <a:t>7</a:t>
             </a:fld>
             <a:endParaRPr lang="en-US"/>
           </a:p>
         </p:txBody>
       </p:sp>
     </p:spTree>
-    <p:extLst>
-      <p:ext uri="{BB962C8B-B14F-4D97-AF65-F5344CB8AC3E}">
-        <p14:creationId xmlns:p14="http://schemas.microsoft.com/office/powerpoint/2010/main" val="1024086991"/>
-      </p:ext>
-    </p:extLst>
   </p:cSld>
   <p:clrMapOvr>
     <a:masterClrMapping/>
@@ -2322,10 +2341,6 @@
           <a:bodyPr/>
           <a:lstStyle/>
           <a:p>
-            <a:r>
-              <a:rPr lang="en-US" dirty="0"/>
-              <a:t/>
-            </a:r>
             <a:endParaRPr lang="en-US" dirty="0"/>
           </a:p>
         </p:txBody>
@@ -2347,18 +2362,12 @@
           <a:p>
             <a:fld id="{F7021451-1387-4CA6-816F-3879F97B5CBC}" type="slidenum">
               <a:rPr lang="en-US"/>
-              <a:t>8</a:t>
             </a:fld>
             <a:endParaRPr lang="en-US"/>
           </a:p>
         </p:txBody>
       </p:sp>
     </p:spTree>
-    <p:extLst>
-      <p:ext uri="{BB962C8B-B14F-4D97-AF65-F5344CB8AC3E}">
-        <p14:creationId xmlns:p14="http://schemas.microsoft.com/office/powerpoint/2010/main" val="1024086991"/>
-      </p:ext>
-    </p:extLst>
   </p:cSld>
   <p:clrMapOvr>
     <a:masterClrMapping/>
@@ -2410,10 +2419,6 @@
           <a:bodyPr/>
           <a:lstStyle/>
           <a:p>
-            <a:r>
-              <a:rPr lang="en-US" dirty="0"/>
-              <a:t/>
-            </a:r>
             <a:endParaRPr lang="en-US" dirty="0"/>
           </a:p>
         </p:txBody>
@@ -2435,18 +2440,12 @@
           <a:p>
             <a:fld id="{F7021451-1387-4CA6-816F-3879F97B5CBC}" type="slidenum">
               <a:rPr lang="en-US"/>
-              <a:t>9</a:t>
             </a:fld>
             <a:endParaRPr lang="en-US"/>
           </a:p>
         </p:txBody>
       </p:sp>
     </p:spTree>
-    <p:extLst>
-      <p:ext uri="{BB962C8B-B14F-4D97-AF65-F5344CB8AC3E}">
-        <p14:creationId xmlns:p14="http://schemas.microsoft.com/office/powerpoint/2010/main" val="1024086991"/>
-      </p:ext>
-    </p:extLst>
   </p:cSld>
   <p:clrMapOvr>
     <a:masterClrMapping/>
@@ -2487,6 +2486,11 @@
 <file path=ppt/slideMasters/slideMaster1.xml><?xml version="1.0" encoding="utf-8"?>
 <p:sldMaster xmlns:a="http://schemas.openxmlformats.org/drawingml/2006/main" xmlns:r="http://schemas.openxmlformats.org/officeDocument/2006/relationships" xmlns:p="http://schemas.openxmlformats.org/presentationml/2006/main">
   <p:cSld>
+    <p:bg>
+      <p:bgRef idx="1001">
+        <a:schemeClr val="bg1"/>
+      </p:bgRef>
+    </p:bg>
     <p:spTree>
       <p:nvGrpSpPr>
         <p:cNvPr id="1" name=""/>
@@ -2530,7 +2534,7 @@
         <a:spcBef>
           <a:spcPct val="20000"/>
         </a:spcBef>
-        <a:buFont typeface="Arial" pitchFamily="34" charset="0"/>
+        <a:buFont typeface="Arial" panose="020B0604020202090204" pitchFamily="34" charset="0"/>
         <a:buChar char="•"/>
         <a:defRPr sz="3200" kern="1200">
           <a:solidFill>
@@ -2545,7 +2549,7 @@
         <a:spcBef>
           <a:spcPct val="20000"/>
         </a:spcBef>
-        <a:buFont typeface="Arial" pitchFamily="34" charset="0"/>
+        <a:buFont typeface="Arial" panose="020B0604020202090204" pitchFamily="34" charset="0"/>
         <a:buChar char="–"/>
         <a:defRPr sz="2800" kern="1200">
           <a:solidFill>
@@ -2560,7 +2564,7 @@
         <a:spcBef>
           <a:spcPct val="20000"/>
         </a:spcBef>
-        <a:buFont typeface="Arial" pitchFamily="34" charset="0"/>
+        <a:buFont typeface="Arial" panose="020B0604020202090204" pitchFamily="34" charset="0"/>
         <a:buChar char="•"/>
         <a:defRPr sz="2400" kern="1200">
           <a:solidFill>
@@ -2575,7 +2579,7 @@
         <a:spcBef>
           <a:spcPct val="20000"/>
         </a:spcBef>
-        <a:buFont typeface="Arial" pitchFamily="34" charset="0"/>
+        <a:buFont typeface="Arial" panose="020B0604020202090204" pitchFamily="34" charset="0"/>
         <a:buChar char="–"/>
         <a:defRPr sz="2000" kern="1200">
           <a:solidFill>
@@ -2590,7 +2594,7 @@
         <a:spcBef>
           <a:spcPct val="20000"/>
         </a:spcBef>
-        <a:buFont typeface="Arial" pitchFamily="34" charset="0"/>
+        <a:buFont typeface="Arial" panose="020B0604020202090204" pitchFamily="34" charset="0"/>
         <a:buChar char="»"/>
         <a:defRPr sz="2000" kern="1200">
           <a:solidFill>
@@ -2605,7 +2609,7 @@
         <a:spcBef>
           <a:spcPct val="20000"/>
         </a:spcBef>
-        <a:buFont typeface="Arial" pitchFamily="34" charset="0"/>
+        <a:buFont typeface="Arial" panose="020B0604020202090204" pitchFamily="34" charset="0"/>
         <a:buChar char="•"/>
         <a:defRPr sz="2000" kern="1200">
           <a:solidFill>
@@ -2620,7 +2624,7 @@
         <a:spcBef>
           <a:spcPct val="20000"/>
         </a:spcBef>
-        <a:buFont typeface="Arial" pitchFamily="34" charset="0"/>
+        <a:buFont typeface="Arial" panose="020B0604020202090204" pitchFamily="34" charset="0"/>
         <a:buChar char="•"/>
         <a:defRPr sz="2000" kern="1200">
           <a:solidFill>
@@ -2635,7 +2639,7 @@
         <a:spcBef>
           <a:spcPct val="20000"/>
         </a:spcBef>
-        <a:buFont typeface="Arial" pitchFamily="34" charset="0"/>
+        <a:buFont typeface="Arial" panose="020B0604020202090204" pitchFamily="34" charset="0"/>
         <a:buChar char="•"/>
         <a:defRPr sz="2000" kern="1200">
           <a:solidFill>
@@ -2650,7 +2654,7 @@
         <a:spcBef>
           <a:spcPct val="20000"/>
         </a:spcBef>
-        <a:buFont typeface="Arial" pitchFamily="34" charset="0"/>
+        <a:buFont typeface="Arial" panose="020B0604020202090204" pitchFamily="34" charset="0"/>
         <a:buChar char="•"/>
         <a:defRPr sz="2000" kern="1200">
           <a:solidFill>
@@ -2763,12 +2767,13 @@
 
 <file path=ppt/slides/slide1.xml><?xml version="1.0" encoding="utf-8"?>
 <p:sld xmlns:a="http://schemas.openxmlformats.org/drawingml/2006/main" xmlns:r="http://schemas.openxmlformats.org/officeDocument/2006/relationships" xmlns:p="http://schemas.openxmlformats.org/presentationml/2006/main">
-  <p:cSld name="Slide 1">
+  <p:cSld>
     <p:bg>
       <p:bgPr>
         <a:solidFill>
           <a:srgbClr val="16253D"/>
         </a:solidFill>
+        <a:effectLst/>
       </p:bgPr>
     </p:bg>
     <p:spTree>
@@ -2787,46 +2792,6 @@
       </p:grpSpPr>
       <p:sp>
         <p:nvSpPr>
-          <p:cNvPr id="2" name="Shape 0"/>
-          <p:cNvSpPr/>
-          <p:nvPr/>
-        </p:nvSpPr>
-        <p:spPr>
-          <a:xfrm>
-            <a:off x="8778240" y="-2103120"/>
-            <a:ext cx="6400800" cy="6400800"/>
-          </a:xfrm>
-          <a:prstGeom prst="ellipse">
-            <a:avLst/>
-          </a:prstGeom>
-          <a:solidFill>
-            <a:srgbClr val="1F3A5C"/>
-          </a:solidFill>
-          <a:ln/>
-        </p:spPr>
-      </p:sp>
-      <p:sp>
-        <p:nvSpPr>
-          <p:cNvPr id="3" name="Shape 1"/>
-          <p:cNvSpPr/>
-          <p:nvPr/>
-        </p:nvSpPr>
-        <p:spPr>
-          <a:xfrm>
-            <a:off x="10607040" y="3291840"/>
-            <a:ext cx="3657600" cy="3657600"/>
-          </a:xfrm>
-          <a:prstGeom prst="ellipse">
-            <a:avLst/>
-          </a:prstGeom>
-          <a:solidFill>
-            <a:srgbClr val="223F63"/>
-          </a:solidFill>
-          <a:ln/>
-        </p:spPr>
-      </p:sp>
-      <p:sp>
-        <p:nvSpPr>
           <p:cNvPr id="4" name="Text 2"/>
           <p:cNvSpPr/>
           <p:nvPr/>
@@ -2840,17 +2805,16 @@
             <a:avLst/>
           </a:prstGeom>
           <a:noFill/>
-          <a:ln/>
         </p:spPr>
         <p:txBody>
           <a:bodyPr wrap="square" rtlCol="0" anchor="ctr"/>
           <a:lstStyle/>
           <a:p>
-            <a:pPr indent="0" marL="0">
-              <a:buNone/>
-            </a:pPr>
-            <a:r>
-              <a:rPr lang="en-US" sz="1400" b="1" spc="120" kern="0" dirty="0">
+            <a:pPr marL="0" indent="0">
+              <a:buNone/>
+            </a:pPr>
+            <a:r>
+              <a:rPr lang="en-US" sz="1400" b="1" kern="0" spc="120" dirty="0">
                 <a:solidFill>
                   <a:srgbClr val="E0A458"/>
                 </a:solidFill>
@@ -2879,13 +2843,12 @@
             <a:avLst/>
           </a:prstGeom>
           <a:noFill/>
-          <a:ln/>
         </p:spPr>
         <p:txBody>
           <a:bodyPr wrap="square" lIns="0" tIns="0" rIns="0" bIns="0" rtlCol="0" anchor="ctr"/>
           <a:lstStyle/>
           <a:p>
-            <a:pPr indent="0" marL="0">
+            <a:pPr marL="0" indent="0">
               <a:buNone/>
             </a:pPr>
             <a:r>
@@ -2918,13 +2881,12 @@
             <a:avLst/>
           </a:prstGeom>
           <a:noFill/>
-          <a:ln/>
         </p:spPr>
         <p:txBody>
           <a:bodyPr wrap="square" lIns="0" tIns="0" rIns="0" bIns="0" rtlCol="0" anchor="ctr"/>
           <a:lstStyle/>
           <a:p>
-            <a:pPr indent="0" marL="0">
+            <a:pPr marL="0" indent="0">
               <a:buNone/>
             </a:pPr>
             <a:r>
@@ -2957,13 +2919,12 @@
             <a:avLst/>
           </a:prstGeom>
           <a:noFill/>
-          <a:ln/>
         </p:spPr>
         <p:txBody>
           <a:bodyPr wrap="square" rtlCol="0" anchor="ctr"/>
           <a:lstStyle/>
           <a:p>
-            <a:pPr indent="0" marL="0">
+            <a:pPr marL="0" indent="0">
               <a:lnSpc>
                 <a:spcPct val="130000"/>
               </a:lnSpc>
@@ -2983,7 +2944,7 @@
             <a:endParaRPr lang="en-US" sz="1300" dirty="0"/>
           </a:p>
           <a:p>
-            <a:pPr indent="0" marL="0">
+            <a:pPr marL="0" indent="0">
               <a:lnSpc>
                 <a:spcPct val="130000"/>
               </a:lnSpc>
@@ -3003,27 +2964,7 @@
             <a:endParaRPr lang="en-US" sz="1300" dirty="0"/>
           </a:p>
           <a:p>
-            <a:pPr indent="0" marL="0">
-              <a:lnSpc>
-                <a:spcPct val="130000"/>
-              </a:lnSpc>
-              <a:buNone/>
-            </a:pPr>
-            <a:r>
-              <a:rPr lang="en-US" sz="1300" dirty="0">
-                <a:solidFill>
-                  <a:srgbClr val="E7EDF3"/>
-                </a:solidFill>
-                <a:latin typeface="Calibri" pitchFamily="34" charset="0"/>
-                <a:ea typeface="Calibri" pitchFamily="34" charset="-122"/>
-                <a:cs typeface="Calibri" pitchFamily="34" charset="-120"/>
-              </a:rPr>
-              <a:t>Four-week engagement · July 6 – August 1, 2026</a:t>
-            </a:r>
-            <a:endParaRPr lang="en-US" sz="1300" dirty="0"/>
-          </a:p>
-          <a:p>
-            <a:pPr indent="0" marL="0">
+            <a:pPr marL="0" indent="0">
               <a:lnSpc>
                 <a:spcPct val="130000"/>
               </a:lnSpc>
@@ -3054,12 +2995,13 @@
 
 <file path=ppt/slides/slide10.xml><?xml version="1.0" encoding="utf-8"?>
 <p:sld xmlns:a="http://schemas.openxmlformats.org/drawingml/2006/main" xmlns:r="http://schemas.openxmlformats.org/officeDocument/2006/relationships" xmlns:p="http://schemas.openxmlformats.org/presentationml/2006/main">
-  <p:cSld name="Slide 10">
+  <p:cSld>
     <p:bg>
       <p:bgPr>
         <a:solidFill>
           <a:srgbClr val="FFFFFF"/>
         </a:solidFill>
+        <a:effectLst/>
       </p:bgPr>
     </p:bg>
     <p:spTree>
@@ -3091,17 +3033,16 @@
             <a:avLst/>
           </a:prstGeom>
           <a:noFill/>
-          <a:ln/>
         </p:spPr>
         <p:txBody>
           <a:bodyPr wrap="square" rtlCol="0" anchor="ctr"/>
           <a:lstStyle/>
           <a:p>
-            <a:pPr indent="0" marL="0">
-              <a:buNone/>
-            </a:pPr>
-            <a:r>
-              <a:rPr lang="en-US" sz="1200" b="1" spc="100" kern="0" dirty="0">
+            <a:pPr marL="0" indent="0">
+              <a:buNone/>
+            </a:pPr>
+            <a:r>
+              <a:rPr lang="en-US" sz="1200" b="1" kern="0" spc="100" dirty="0">
                 <a:solidFill>
                   <a:srgbClr val="3E6E8E"/>
                 </a:solidFill>
@@ -3130,13 +3071,12 @@
             <a:avLst/>
           </a:prstGeom>
           <a:noFill/>
-          <a:ln/>
         </p:spPr>
         <p:txBody>
           <a:bodyPr wrap="square" lIns="0" tIns="0" rIns="0" bIns="0" rtlCol="0" anchor="ctr"/>
           <a:lstStyle/>
           <a:p>
-            <a:pPr indent="0" marL="0">
+            <a:pPr marL="0" indent="0">
               <a:buNone/>
             </a:pPr>
             <a:r>
@@ -3173,7 +3113,6 @@
           <a:solidFill>
             <a:srgbClr val="F1F4F7"/>
           </a:solidFill>
-          <a:ln/>
         </p:spPr>
       </p:sp>
       <p:sp>
@@ -3195,7 +3134,6 @@
           <a:solidFill>
             <a:srgbClr val="3E6E8E"/>
           </a:solidFill>
-          <a:ln/>
         </p:spPr>
       </p:sp>
       <p:sp>
@@ -3213,13 +3151,12 @@
             <a:avLst/>
           </a:prstGeom>
           <a:noFill/>
-          <a:ln/>
         </p:spPr>
         <p:txBody>
           <a:bodyPr wrap="square" lIns="0" tIns="0" rIns="0" bIns="0" rtlCol="0" anchor="ctr"/>
           <a:lstStyle/>
           <a:p>
-            <a:pPr algn="ctr" indent="0" marL="0">
+            <a:pPr marL="0" indent="0" algn="ctr">
               <a:buNone/>
             </a:pPr>
             <a:r>
@@ -3252,13 +3189,12 @@
             <a:avLst/>
           </a:prstGeom>
           <a:noFill/>
-          <a:ln/>
         </p:spPr>
         <p:txBody>
           <a:bodyPr wrap="square" lIns="0" tIns="0" rIns="0" bIns="0" rtlCol="0" anchor="ctr"/>
           <a:lstStyle/>
           <a:p>
-            <a:pPr indent="0" marL="0">
+            <a:pPr marL="0" indent="0">
               <a:buNone/>
             </a:pPr>
             <a:r>
@@ -3291,13 +3227,12 @@
             <a:avLst/>
           </a:prstGeom>
           <a:noFill/>
-          <a:ln/>
         </p:spPr>
         <p:txBody>
           <a:bodyPr wrap="square" lIns="0" tIns="0" rIns="0" bIns="0" rtlCol="0" anchor="t"/>
           <a:lstStyle/>
           <a:p>
-            <a:pPr indent="0" marL="0">
+            <a:pPr marL="0" indent="0">
               <a:lnSpc>
                 <a:spcPct val="115000"/>
               </a:lnSpc>
@@ -3337,7 +3272,6 @@
           <a:solidFill>
             <a:srgbClr val="F1F4F7"/>
           </a:solidFill>
-          <a:ln/>
         </p:spPr>
       </p:sp>
       <p:sp>
@@ -3359,7 +3293,6 @@
           <a:solidFill>
             <a:srgbClr val="3E6E8E"/>
           </a:solidFill>
-          <a:ln/>
         </p:spPr>
       </p:sp>
       <p:sp>
@@ -3377,13 +3310,12 @@
             <a:avLst/>
           </a:prstGeom>
           <a:noFill/>
-          <a:ln/>
         </p:spPr>
         <p:txBody>
           <a:bodyPr wrap="square" lIns="0" tIns="0" rIns="0" bIns="0" rtlCol="0" anchor="ctr"/>
           <a:lstStyle/>
           <a:p>
-            <a:pPr algn="ctr" indent="0" marL="0">
+            <a:pPr marL="0" indent="0" algn="ctr">
               <a:buNone/>
             </a:pPr>
             <a:r>
@@ -3416,13 +3348,12 @@
             <a:avLst/>
           </a:prstGeom>
           <a:noFill/>
-          <a:ln/>
         </p:spPr>
         <p:txBody>
           <a:bodyPr wrap="square" lIns="0" tIns="0" rIns="0" bIns="0" rtlCol="0" anchor="ctr"/>
           <a:lstStyle/>
           <a:p>
-            <a:pPr indent="0" marL="0">
+            <a:pPr marL="0" indent="0">
               <a:buNone/>
             </a:pPr>
             <a:r>
@@ -3455,13 +3386,12 @@
             <a:avLst/>
           </a:prstGeom>
           <a:noFill/>
-          <a:ln/>
         </p:spPr>
         <p:txBody>
           <a:bodyPr wrap="square" lIns="0" tIns="0" rIns="0" bIns="0" rtlCol="0" anchor="t"/>
           <a:lstStyle/>
           <a:p>
-            <a:pPr indent="0" marL="0">
+            <a:pPr marL="0" indent="0">
               <a:lnSpc>
                 <a:spcPct val="115000"/>
               </a:lnSpc>
@@ -3497,13 +3427,12 @@
             <a:avLst/>
           </a:prstGeom>
           <a:noFill/>
-          <a:ln/>
         </p:spPr>
         <p:txBody>
           <a:bodyPr wrap="square" rtlCol="0" anchor="ctr"/>
           <a:lstStyle/>
           <a:p>
-            <a:pPr algn="r" indent="0" marL="0">
+            <a:pPr marL="0" indent="0" algn="r">
               <a:buNone/>
             </a:pPr>
             <a:r>
@@ -3531,12 +3460,13 @@
 
 <file path=ppt/slides/slide11.xml><?xml version="1.0" encoding="utf-8"?>
 <p:sld xmlns:a="http://schemas.openxmlformats.org/drawingml/2006/main" xmlns:r="http://schemas.openxmlformats.org/officeDocument/2006/relationships" xmlns:p="http://schemas.openxmlformats.org/presentationml/2006/main">
-  <p:cSld name="Slide 11">
+  <p:cSld>
     <p:bg>
       <p:bgPr>
         <a:solidFill>
           <a:srgbClr val="FFFFFF"/>
         </a:solidFill>
+        <a:effectLst/>
       </p:bgPr>
     </p:bg>
     <p:spTree>
@@ -3568,17 +3498,16 @@
             <a:avLst/>
           </a:prstGeom>
           <a:noFill/>
-          <a:ln/>
         </p:spPr>
         <p:txBody>
           <a:bodyPr wrap="square" rtlCol="0" anchor="ctr"/>
           <a:lstStyle/>
           <a:p>
-            <a:pPr indent="0" marL="0">
-              <a:buNone/>
-            </a:pPr>
-            <a:r>
-              <a:rPr lang="en-US" sz="1200" b="1" spc="100" kern="0" dirty="0">
+            <a:pPr marL="0" indent="0">
+              <a:buNone/>
+            </a:pPr>
+            <a:r>
+              <a:rPr lang="en-US" sz="1200" b="1" kern="0" spc="100" dirty="0">
                 <a:solidFill>
                   <a:srgbClr val="3E6E8E"/>
                 </a:solidFill>
@@ -3607,13 +3536,12 @@
             <a:avLst/>
           </a:prstGeom>
           <a:noFill/>
-          <a:ln/>
         </p:spPr>
         <p:txBody>
           <a:bodyPr wrap="square" lIns="0" tIns="0" rIns="0" bIns="0" rtlCol="0" anchor="ctr"/>
           <a:lstStyle/>
           <a:p>
-            <a:pPr indent="0" marL="0">
+            <a:pPr marL="0" indent="0">
               <a:buNone/>
             </a:pPr>
             <a:r>
@@ -3648,7 +3576,6 @@
           <a:solidFill>
             <a:srgbClr val="E0A458"/>
           </a:solidFill>
-          <a:ln/>
         </p:spPr>
       </p:sp>
       <p:sp>
@@ -3666,13 +3593,12 @@
             <a:avLst/>
           </a:prstGeom>
           <a:noFill/>
-          <a:ln/>
         </p:spPr>
         <p:txBody>
           <a:bodyPr wrap="square" lIns="0" tIns="0" rIns="0" bIns="0" rtlCol="0" anchor="t"/>
           <a:lstStyle/>
           <a:p>
-            <a:pPr indent="0" marL="0">
+            <a:pPr marL="0" indent="0">
               <a:buNone/>
             </a:pPr>
             <a:r>
@@ -3705,13 +3631,12 @@
             <a:avLst/>
           </a:prstGeom>
           <a:noFill/>
-          <a:ln/>
         </p:spPr>
         <p:txBody>
           <a:bodyPr wrap="square" lIns="0" tIns="0" rIns="0" bIns="0" rtlCol="0" anchor="t"/>
           <a:lstStyle/>
           <a:p>
-            <a:pPr indent="0" marL="0">
+            <a:pPr marL="0" indent="0">
               <a:buNone/>
             </a:pPr>
             <a:r>
@@ -3746,7 +3671,6 @@
           <a:solidFill>
             <a:srgbClr val="E0A458"/>
           </a:solidFill>
-          <a:ln/>
         </p:spPr>
       </p:sp>
       <p:sp>
@@ -3764,13 +3688,12 @@
             <a:avLst/>
           </a:prstGeom>
           <a:noFill/>
-          <a:ln/>
         </p:spPr>
         <p:txBody>
           <a:bodyPr wrap="square" lIns="0" tIns="0" rIns="0" bIns="0" rtlCol="0" anchor="t"/>
           <a:lstStyle/>
           <a:p>
-            <a:pPr indent="0" marL="0">
+            <a:pPr marL="0" indent="0">
               <a:buNone/>
             </a:pPr>
             <a:r>
@@ -3803,13 +3726,12 @@
             <a:avLst/>
           </a:prstGeom>
           <a:noFill/>
-          <a:ln/>
         </p:spPr>
         <p:txBody>
           <a:bodyPr wrap="square" lIns="0" tIns="0" rIns="0" bIns="0" rtlCol="0" anchor="t"/>
           <a:lstStyle/>
           <a:p>
-            <a:pPr indent="0" marL="0">
+            <a:pPr marL="0" indent="0">
               <a:buNone/>
             </a:pPr>
             <a:r>
@@ -3844,7 +3766,6 @@
           <a:solidFill>
             <a:srgbClr val="E0A458"/>
           </a:solidFill>
-          <a:ln/>
         </p:spPr>
       </p:sp>
       <p:sp>
@@ -3862,13 +3783,12 @@
             <a:avLst/>
           </a:prstGeom>
           <a:noFill/>
-          <a:ln/>
         </p:spPr>
         <p:txBody>
           <a:bodyPr wrap="square" lIns="0" tIns="0" rIns="0" bIns="0" rtlCol="0" anchor="t"/>
           <a:lstStyle/>
           <a:p>
-            <a:pPr indent="0" marL="0">
+            <a:pPr marL="0" indent="0">
               <a:buNone/>
             </a:pPr>
             <a:r>
@@ -3901,13 +3821,12 @@
             <a:avLst/>
           </a:prstGeom>
           <a:noFill/>
-          <a:ln/>
         </p:spPr>
         <p:txBody>
           <a:bodyPr wrap="square" lIns="0" tIns="0" rIns="0" bIns="0" rtlCol="0" anchor="t"/>
           <a:lstStyle/>
           <a:p>
-            <a:pPr indent="0" marL="0">
+            <a:pPr marL="0" indent="0">
               <a:buNone/>
             </a:pPr>
             <a:r>
@@ -3942,7 +3861,6 @@
           <a:solidFill>
             <a:srgbClr val="E0A458"/>
           </a:solidFill>
-          <a:ln/>
         </p:spPr>
       </p:sp>
       <p:sp>
@@ -3960,13 +3878,12 @@
             <a:avLst/>
           </a:prstGeom>
           <a:noFill/>
-          <a:ln/>
         </p:spPr>
         <p:txBody>
           <a:bodyPr wrap="square" lIns="0" tIns="0" rIns="0" bIns="0" rtlCol="0" anchor="t"/>
           <a:lstStyle/>
           <a:p>
-            <a:pPr indent="0" marL="0">
+            <a:pPr marL="0" indent="0">
               <a:buNone/>
             </a:pPr>
             <a:r>
@@ -3999,13 +3916,12 @@
             <a:avLst/>
           </a:prstGeom>
           <a:noFill/>
-          <a:ln/>
         </p:spPr>
         <p:txBody>
           <a:bodyPr wrap="square" lIns="0" tIns="0" rIns="0" bIns="0" rtlCol="0" anchor="t"/>
           <a:lstStyle/>
           <a:p>
-            <a:pPr indent="0" marL="0">
+            <a:pPr marL="0" indent="0">
               <a:buNone/>
             </a:pPr>
             <a:r>
@@ -4040,7 +3956,6 @@
           <a:solidFill>
             <a:srgbClr val="E0A458"/>
           </a:solidFill>
-          <a:ln/>
         </p:spPr>
       </p:sp>
       <p:sp>
@@ -4058,13 +3973,12 @@
             <a:avLst/>
           </a:prstGeom>
           <a:noFill/>
-          <a:ln/>
         </p:spPr>
         <p:txBody>
           <a:bodyPr wrap="square" lIns="0" tIns="0" rIns="0" bIns="0" rtlCol="0" anchor="t"/>
           <a:lstStyle/>
           <a:p>
-            <a:pPr indent="0" marL="0">
+            <a:pPr marL="0" indent="0">
               <a:buNone/>
             </a:pPr>
             <a:r>
@@ -4097,13 +4011,12 @@
             <a:avLst/>
           </a:prstGeom>
           <a:noFill/>
-          <a:ln/>
         </p:spPr>
         <p:txBody>
           <a:bodyPr wrap="square" lIns="0" tIns="0" rIns="0" bIns="0" rtlCol="0" anchor="t"/>
           <a:lstStyle/>
           <a:p>
-            <a:pPr indent="0" marL="0">
+            <a:pPr marL="0" indent="0">
               <a:buNone/>
             </a:pPr>
             <a:r>
@@ -4136,13 +4049,12 @@
             <a:avLst/>
           </a:prstGeom>
           <a:noFill/>
-          <a:ln/>
         </p:spPr>
         <p:txBody>
           <a:bodyPr wrap="square" rtlCol="0" anchor="ctr"/>
           <a:lstStyle/>
           <a:p>
-            <a:pPr algn="r" indent="0" marL="0">
+            <a:pPr marL="0" indent="0" algn="r">
               <a:buNone/>
             </a:pPr>
             <a:r>
@@ -4170,12 +4082,13 @@
 
 <file path=ppt/slides/slide12.xml><?xml version="1.0" encoding="utf-8"?>
 <p:sld xmlns:a="http://schemas.openxmlformats.org/drawingml/2006/main" xmlns:r="http://schemas.openxmlformats.org/officeDocument/2006/relationships" xmlns:p="http://schemas.openxmlformats.org/presentationml/2006/main">
-  <p:cSld name="Slide 12">
+  <p:cSld>
     <p:bg>
       <p:bgPr>
         <a:solidFill>
           <a:srgbClr val="16253D"/>
         </a:solidFill>
+        <a:effectLst/>
       </p:bgPr>
     </p:bg>
     <p:spTree>
@@ -4194,26 +4107,6 @@
       </p:grpSpPr>
       <p:sp>
         <p:nvSpPr>
-          <p:cNvPr id="2" name="Shape 0"/>
-          <p:cNvSpPr/>
-          <p:nvPr/>
-        </p:nvSpPr>
-        <p:spPr>
-          <a:xfrm>
-            <a:off x="-2286000" y="3840480"/>
-            <a:ext cx="5486400" cy="5486400"/>
-          </a:xfrm>
-          <a:prstGeom prst="ellipse">
-            <a:avLst/>
-          </a:prstGeom>
-          <a:solidFill>
-            <a:srgbClr val="1F3A5C"/>
-          </a:solidFill>
-          <a:ln/>
-        </p:spPr>
-      </p:sp>
-      <p:sp>
-        <p:nvSpPr>
           <p:cNvPr id="3" name="Text 1"/>
           <p:cNvSpPr/>
           <p:nvPr/>
@@ -4227,17 +4120,16 @@
             <a:avLst/>
           </a:prstGeom>
           <a:noFill/>
-          <a:ln/>
         </p:spPr>
         <p:txBody>
           <a:bodyPr wrap="square" rtlCol="0" anchor="ctr"/>
           <a:lstStyle/>
           <a:p>
-            <a:pPr indent="0" marL="0">
-              <a:buNone/>
-            </a:pPr>
-            <a:r>
-              <a:rPr lang="en-US" sz="1200" b="1" spc="100" kern="0" dirty="0">
+            <a:pPr marL="0" indent="0">
+              <a:buNone/>
+            </a:pPr>
+            <a:r>
+              <a:rPr lang="en-US" sz="1200" b="1" kern="0" spc="100" dirty="0">
                 <a:solidFill>
                   <a:srgbClr val="E0A458"/>
                 </a:solidFill>
@@ -4266,13 +4158,12 @@
             <a:avLst/>
           </a:prstGeom>
           <a:noFill/>
-          <a:ln/>
         </p:spPr>
         <p:txBody>
           <a:bodyPr wrap="square" lIns="0" tIns="0" rIns="0" bIns="0" rtlCol="0" anchor="ctr"/>
           <a:lstStyle/>
           <a:p>
-            <a:pPr indent="0" marL="0">
+            <a:pPr marL="0" indent="0">
               <a:buNone/>
             </a:pPr>
             <a:r>
@@ -4305,13 +4196,12 @@
             <a:avLst/>
           </a:prstGeom>
           <a:noFill/>
-          <a:ln/>
         </p:spPr>
         <p:txBody>
           <a:bodyPr wrap="square" lIns="0" tIns="0" rIns="0" bIns="0" rtlCol="0" anchor="ctr"/>
           <a:lstStyle/>
           <a:p>
-            <a:pPr indent="0" marL="0">
+            <a:pPr marL="0" indent="0">
               <a:buNone/>
             </a:pPr>
             <a:r>
@@ -4371,13 +4261,12 @@
             <a:avLst/>
           </a:prstGeom>
           <a:noFill/>
-          <a:ln/>
         </p:spPr>
         <p:txBody>
           <a:bodyPr wrap="square" lIns="0" tIns="0" rIns="0" bIns="0" rtlCol="0" anchor="ctr"/>
           <a:lstStyle/>
           <a:p>
-            <a:pPr algn="ctr" indent="0" marL="0">
+            <a:pPr marL="0" indent="0" algn="ctr">
               <a:buNone/>
             </a:pPr>
             <a:r>
@@ -4437,13 +4326,12 @@
             <a:avLst/>
           </a:prstGeom>
           <a:noFill/>
-          <a:ln/>
         </p:spPr>
         <p:txBody>
           <a:bodyPr wrap="square" lIns="0" tIns="0" rIns="0" bIns="0" rtlCol="0" anchor="ctr"/>
           <a:lstStyle/>
           <a:p>
-            <a:pPr algn="ctr" indent="0" marL="0">
+            <a:pPr marL="0" indent="0" algn="ctr">
               <a:buNone/>
             </a:pPr>
             <a:r>
@@ -4503,13 +4391,12 @@
             <a:avLst/>
           </a:prstGeom>
           <a:noFill/>
-          <a:ln/>
         </p:spPr>
         <p:txBody>
           <a:bodyPr wrap="square" lIns="0" tIns="0" rIns="0" bIns="0" rtlCol="0" anchor="ctr"/>
           <a:lstStyle/>
           <a:p>
-            <a:pPr algn="ctr" indent="0" marL="0">
+            <a:pPr marL="0" indent="0" algn="ctr">
               <a:buNone/>
             </a:pPr>
             <a:r>
@@ -4546,7 +4433,6 @@
           <a:solidFill>
             <a:srgbClr val="1F3A5C"/>
           </a:solidFill>
-          <a:ln/>
         </p:spPr>
       </p:sp>
       <p:sp>
@@ -4564,13 +4450,12 @@
             <a:avLst/>
           </a:prstGeom>
           <a:noFill/>
-          <a:ln/>
         </p:spPr>
         <p:txBody>
           <a:bodyPr wrap="square" lIns="0" tIns="0" rIns="0" bIns="0" rtlCol="0" anchor="ctr"/>
           <a:lstStyle/>
           <a:p>
-            <a:pPr algn="l" indent="0" marL="0">
+            <a:pPr marL="0" indent="0" algn="l">
               <a:buNone/>
             </a:pPr>
             <a:r>
@@ -4603,13 +4488,12 @@
             <a:avLst/>
           </a:prstGeom>
           <a:noFill/>
-          <a:ln/>
         </p:spPr>
         <p:txBody>
           <a:bodyPr wrap="square" lIns="0" tIns="0" rIns="0" bIns="0" rtlCol="0" anchor="t"/>
           <a:lstStyle/>
           <a:p>
-            <a:pPr algn="l" indent="0" marL="0">
+            <a:pPr marL="0" indent="0" algn="l">
               <a:buNone/>
             </a:pPr>
             <a:r>
@@ -4646,7 +4530,6 @@
           <a:solidFill>
             <a:srgbClr val="1F3A5C"/>
           </a:solidFill>
-          <a:ln/>
         </p:spPr>
       </p:sp>
       <p:sp>
@@ -4664,13 +4547,12 @@
             <a:avLst/>
           </a:prstGeom>
           <a:noFill/>
-          <a:ln/>
         </p:spPr>
         <p:txBody>
           <a:bodyPr wrap="square" lIns="0" tIns="0" rIns="0" bIns="0" rtlCol="0" anchor="ctr"/>
           <a:lstStyle/>
           <a:p>
-            <a:pPr algn="l" indent="0" marL="0">
+            <a:pPr marL="0" indent="0" algn="l">
               <a:buNone/>
             </a:pPr>
             <a:r>
@@ -4703,13 +4585,12 @@
             <a:avLst/>
           </a:prstGeom>
           <a:noFill/>
-          <a:ln/>
         </p:spPr>
         <p:txBody>
           <a:bodyPr wrap="square" lIns="0" tIns="0" rIns="0" bIns="0" rtlCol="0" anchor="t"/>
           <a:lstStyle/>
           <a:p>
-            <a:pPr algn="l" indent="0" marL="0">
+            <a:pPr marL="0" indent="0" algn="l">
               <a:buNone/>
             </a:pPr>
             <a:r>
@@ -4746,7 +4627,6 @@
           <a:solidFill>
             <a:srgbClr val="1F3A5C"/>
           </a:solidFill>
-          <a:ln/>
         </p:spPr>
       </p:sp>
       <p:sp>
@@ -4764,13 +4644,12 @@
             <a:avLst/>
           </a:prstGeom>
           <a:noFill/>
-          <a:ln/>
         </p:spPr>
         <p:txBody>
           <a:bodyPr wrap="square" lIns="0" tIns="0" rIns="0" bIns="0" rtlCol="0" anchor="ctr"/>
           <a:lstStyle/>
           <a:p>
-            <a:pPr algn="l" indent="0" marL="0">
+            <a:pPr marL="0" indent="0" algn="l">
               <a:buNone/>
             </a:pPr>
             <a:r>
@@ -4803,13 +4682,12 @@
             <a:avLst/>
           </a:prstGeom>
           <a:noFill/>
-          <a:ln/>
         </p:spPr>
         <p:txBody>
           <a:bodyPr wrap="square" lIns="0" tIns="0" rIns="0" bIns="0" rtlCol="0" anchor="t"/>
           <a:lstStyle/>
           <a:p>
-            <a:pPr algn="l" indent="0" marL="0">
+            <a:pPr marL="0" indent="0" algn="l">
               <a:buNone/>
             </a:pPr>
             <a:r>
@@ -4846,7 +4724,6 @@
           <a:solidFill>
             <a:srgbClr val="1F3A5C"/>
           </a:solidFill>
-          <a:ln/>
         </p:spPr>
       </p:sp>
       <p:sp>
@@ -4864,13 +4741,12 @@
             <a:avLst/>
           </a:prstGeom>
           <a:noFill/>
-          <a:ln/>
         </p:spPr>
         <p:txBody>
           <a:bodyPr wrap="square" lIns="0" tIns="0" rIns="0" bIns="0" rtlCol="0" anchor="ctr"/>
           <a:lstStyle/>
           <a:p>
-            <a:pPr algn="l" indent="0" marL="0">
+            <a:pPr marL="0" indent="0" algn="l">
               <a:buNone/>
             </a:pPr>
             <a:r>
@@ -4903,13 +4779,12 @@
             <a:avLst/>
           </a:prstGeom>
           <a:noFill/>
-          <a:ln/>
         </p:spPr>
         <p:txBody>
           <a:bodyPr wrap="square" lIns="0" tIns="0" rIns="0" bIns="0" rtlCol="0" anchor="t"/>
           <a:lstStyle/>
           <a:p>
-            <a:pPr algn="l" indent="0" marL="0">
+            <a:pPr marL="0" indent="0" algn="l">
               <a:buNone/>
             </a:pPr>
             <a:r>
@@ -4942,13 +4817,12 @@
             <a:avLst/>
           </a:prstGeom>
           <a:noFill/>
-          <a:ln/>
         </p:spPr>
         <p:txBody>
           <a:bodyPr wrap="square" rtlCol="0" anchor="ctr"/>
           <a:lstStyle/>
           <a:p>
-            <a:pPr indent="0" marL="0">
+            <a:pPr marL="0" indent="0">
               <a:buNone/>
             </a:pPr>
             <a:r>
@@ -4981,13 +4855,12 @@
             <a:avLst/>
           </a:prstGeom>
           <a:noFill/>
-          <a:ln/>
         </p:spPr>
         <p:txBody>
           <a:bodyPr wrap="square" rtlCol="0" anchor="ctr"/>
           <a:lstStyle/>
           <a:p>
-            <a:pPr indent="0" marL="0">
+            <a:pPr marL="0" indent="0">
               <a:buNone/>
             </a:pPr>
             <a:r>
@@ -5020,13 +4893,12 @@
             <a:avLst/>
           </a:prstGeom>
           <a:noFill/>
-          <a:ln/>
         </p:spPr>
         <p:txBody>
           <a:bodyPr wrap="square" rtlCol="0" anchor="ctr"/>
           <a:lstStyle/>
           <a:p>
-            <a:pPr algn="r" indent="0" marL="0">
+            <a:pPr marL="0" indent="0" algn="r">
               <a:buNone/>
             </a:pPr>
             <a:r>
@@ -5054,12 +4926,13 @@
 
 <file path=ppt/slides/slide2.xml><?xml version="1.0" encoding="utf-8"?>
 <p:sld xmlns:a="http://schemas.openxmlformats.org/drawingml/2006/main" xmlns:r="http://schemas.openxmlformats.org/officeDocument/2006/relationships" xmlns:p="http://schemas.openxmlformats.org/presentationml/2006/main">
-  <p:cSld name="Slide 2">
+  <p:cSld>
     <p:bg>
       <p:bgPr>
         <a:solidFill>
           <a:srgbClr val="FFFFFF"/>
         </a:solidFill>
+        <a:effectLst/>
       </p:bgPr>
     </p:bg>
     <p:spTree>
@@ -5091,17 +4964,16 @@
             <a:avLst/>
           </a:prstGeom>
           <a:noFill/>
-          <a:ln/>
         </p:spPr>
         <p:txBody>
           <a:bodyPr wrap="square" rtlCol="0" anchor="ctr"/>
           <a:lstStyle/>
           <a:p>
-            <a:pPr indent="0" marL="0">
-              <a:buNone/>
-            </a:pPr>
-            <a:r>
-              <a:rPr lang="en-US" sz="1200" b="1" spc="100" kern="0" dirty="0">
+            <a:pPr marL="0" indent="0">
+              <a:buNone/>
+            </a:pPr>
+            <a:r>
+              <a:rPr lang="en-US" sz="1200" b="1" kern="0" spc="100" dirty="0">
                 <a:solidFill>
                   <a:srgbClr val="3E6E8E"/>
                 </a:solidFill>
@@ -5130,13 +5002,12 @@
             <a:avLst/>
           </a:prstGeom>
           <a:noFill/>
-          <a:ln/>
         </p:spPr>
         <p:txBody>
           <a:bodyPr wrap="square" lIns="0" tIns="0" rIns="0" bIns="0" rtlCol="0" anchor="ctr"/>
           <a:lstStyle/>
           <a:p>
-            <a:pPr indent="0" marL="0">
+            <a:pPr marL="0" indent="0">
               <a:buNone/>
             </a:pPr>
             <a:r>
@@ -5171,7 +5042,6 @@
           <a:solidFill>
             <a:srgbClr val="DCE7EE"/>
           </a:solidFill>
-          <a:ln/>
         </p:spPr>
       </p:sp>
       <p:sp>
@@ -5189,13 +5059,12 @@
             <a:avLst/>
           </a:prstGeom>
           <a:noFill/>
-          <a:ln/>
         </p:spPr>
         <p:txBody>
           <a:bodyPr wrap="square" lIns="0" tIns="0" rIns="0" bIns="0" rtlCol="0" anchor="ctr"/>
           <a:lstStyle/>
           <a:p>
-            <a:pPr algn="ctr" indent="0" marL="0">
+            <a:pPr marL="0" indent="0" algn="ctr">
               <a:buNone/>
             </a:pPr>
             <a:r>
@@ -5228,13 +5097,12 @@
             <a:avLst/>
           </a:prstGeom>
           <a:noFill/>
-          <a:ln/>
         </p:spPr>
         <p:txBody>
           <a:bodyPr wrap="square" lIns="0" tIns="0" rIns="0" bIns="0" rtlCol="0" anchor="ctr"/>
           <a:lstStyle/>
           <a:p>
-            <a:pPr algn="l" indent="0" marL="0">
+            <a:pPr marL="0" indent="0" algn="l">
               <a:buNone/>
             </a:pPr>
             <a:r>
@@ -5269,7 +5137,6 @@
           <a:solidFill>
             <a:srgbClr val="DCE7EE"/>
           </a:solidFill>
-          <a:ln/>
         </p:spPr>
       </p:sp>
       <p:sp>
@@ -5287,13 +5154,12 @@
             <a:avLst/>
           </a:prstGeom>
           <a:noFill/>
-          <a:ln/>
         </p:spPr>
         <p:txBody>
           <a:bodyPr wrap="square" lIns="0" tIns="0" rIns="0" bIns="0" rtlCol="0" anchor="ctr"/>
           <a:lstStyle/>
           <a:p>
-            <a:pPr algn="ctr" indent="0" marL="0">
+            <a:pPr marL="0" indent="0" algn="ctr">
               <a:buNone/>
             </a:pPr>
             <a:r>
@@ -5326,13 +5192,12 @@
             <a:avLst/>
           </a:prstGeom>
           <a:noFill/>
-          <a:ln/>
         </p:spPr>
         <p:txBody>
           <a:bodyPr wrap="square" lIns="0" tIns="0" rIns="0" bIns="0" rtlCol="0" anchor="ctr"/>
           <a:lstStyle/>
           <a:p>
-            <a:pPr algn="l" indent="0" marL="0">
+            <a:pPr marL="0" indent="0" algn="l">
               <a:buNone/>
             </a:pPr>
             <a:r>
@@ -5367,7 +5232,6 @@
           <a:solidFill>
             <a:srgbClr val="DCE7EE"/>
           </a:solidFill>
-          <a:ln/>
         </p:spPr>
       </p:sp>
       <p:sp>
@@ -5385,13 +5249,12 @@
             <a:avLst/>
           </a:prstGeom>
           <a:noFill/>
-          <a:ln/>
         </p:spPr>
         <p:txBody>
           <a:bodyPr wrap="square" lIns="0" tIns="0" rIns="0" bIns="0" rtlCol="0" anchor="ctr"/>
           <a:lstStyle/>
           <a:p>
-            <a:pPr algn="ctr" indent="0" marL="0">
+            <a:pPr marL="0" indent="0" algn="ctr">
               <a:buNone/>
             </a:pPr>
             <a:r>
@@ -5424,13 +5287,12 @@
             <a:avLst/>
           </a:prstGeom>
           <a:noFill/>
-          <a:ln/>
         </p:spPr>
         <p:txBody>
           <a:bodyPr wrap="square" lIns="0" tIns="0" rIns="0" bIns="0" rtlCol="0" anchor="ctr"/>
           <a:lstStyle/>
           <a:p>
-            <a:pPr algn="l" indent="0" marL="0">
+            <a:pPr marL="0" indent="0" algn="l">
               <a:buNone/>
             </a:pPr>
             <a:r>
@@ -5465,7 +5327,6 @@
           <a:solidFill>
             <a:srgbClr val="DCE7EE"/>
           </a:solidFill>
-          <a:ln/>
         </p:spPr>
       </p:sp>
       <p:sp>
@@ -5483,13 +5344,12 @@
             <a:avLst/>
           </a:prstGeom>
           <a:noFill/>
-          <a:ln/>
         </p:spPr>
         <p:txBody>
           <a:bodyPr wrap="square" lIns="0" tIns="0" rIns="0" bIns="0" rtlCol="0" anchor="ctr"/>
           <a:lstStyle/>
           <a:p>
-            <a:pPr algn="ctr" indent="0" marL="0">
+            <a:pPr marL="0" indent="0" algn="ctr">
               <a:buNone/>
             </a:pPr>
             <a:r>
@@ -5522,13 +5382,12 @@
             <a:avLst/>
           </a:prstGeom>
           <a:noFill/>
-          <a:ln/>
         </p:spPr>
         <p:txBody>
           <a:bodyPr wrap="square" lIns="0" tIns="0" rIns="0" bIns="0" rtlCol="0" anchor="ctr"/>
           <a:lstStyle/>
           <a:p>
-            <a:pPr algn="l" indent="0" marL="0">
+            <a:pPr marL="0" indent="0" algn="l">
               <a:buNone/>
             </a:pPr>
             <a:r>
@@ -5563,7 +5422,6 @@
           <a:solidFill>
             <a:srgbClr val="DCE7EE"/>
           </a:solidFill>
-          <a:ln/>
         </p:spPr>
       </p:sp>
       <p:sp>
@@ -5581,13 +5439,12 @@
             <a:avLst/>
           </a:prstGeom>
           <a:noFill/>
-          <a:ln/>
         </p:spPr>
         <p:txBody>
           <a:bodyPr wrap="square" lIns="0" tIns="0" rIns="0" bIns="0" rtlCol="0" anchor="ctr"/>
           <a:lstStyle/>
           <a:p>
-            <a:pPr algn="ctr" indent="0" marL="0">
+            <a:pPr marL="0" indent="0" algn="ctr">
               <a:buNone/>
             </a:pPr>
             <a:r>
@@ -5620,13 +5477,12 @@
             <a:avLst/>
           </a:prstGeom>
           <a:noFill/>
-          <a:ln/>
         </p:spPr>
         <p:txBody>
           <a:bodyPr wrap="square" lIns="0" tIns="0" rIns="0" bIns="0" rtlCol="0" anchor="ctr"/>
           <a:lstStyle/>
           <a:p>
-            <a:pPr algn="l" indent="0" marL="0">
+            <a:pPr marL="0" indent="0" algn="l">
               <a:buNone/>
             </a:pPr>
             <a:r>
@@ -5661,7 +5517,6 @@
           <a:solidFill>
             <a:srgbClr val="DCE7EE"/>
           </a:solidFill>
-          <a:ln/>
         </p:spPr>
       </p:sp>
       <p:sp>
@@ -5679,13 +5534,12 @@
             <a:avLst/>
           </a:prstGeom>
           <a:noFill/>
-          <a:ln/>
         </p:spPr>
         <p:txBody>
           <a:bodyPr wrap="square" lIns="0" tIns="0" rIns="0" bIns="0" rtlCol="0" anchor="ctr"/>
           <a:lstStyle/>
           <a:p>
-            <a:pPr algn="ctr" indent="0" marL="0">
+            <a:pPr marL="0" indent="0" algn="ctr">
               <a:buNone/>
             </a:pPr>
             <a:r>
@@ -5718,13 +5572,12 @@
             <a:avLst/>
           </a:prstGeom>
           <a:noFill/>
-          <a:ln/>
         </p:spPr>
         <p:txBody>
           <a:bodyPr wrap="square" lIns="0" tIns="0" rIns="0" bIns="0" rtlCol="0" anchor="ctr"/>
           <a:lstStyle/>
           <a:p>
-            <a:pPr algn="l" indent="0" marL="0">
+            <a:pPr marL="0" indent="0" algn="l">
               <a:buNone/>
             </a:pPr>
             <a:r>
@@ -5759,7 +5612,6 @@
           <a:solidFill>
             <a:srgbClr val="DCE7EE"/>
           </a:solidFill>
-          <a:ln/>
         </p:spPr>
       </p:sp>
       <p:sp>
@@ -5777,13 +5629,12 @@
             <a:avLst/>
           </a:prstGeom>
           <a:noFill/>
-          <a:ln/>
         </p:spPr>
         <p:txBody>
           <a:bodyPr wrap="square" lIns="0" tIns="0" rIns="0" bIns="0" rtlCol="0" anchor="ctr"/>
           <a:lstStyle/>
           <a:p>
-            <a:pPr algn="ctr" indent="0" marL="0">
+            <a:pPr marL="0" indent="0" algn="ctr">
               <a:buNone/>
             </a:pPr>
             <a:r>
@@ -5816,13 +5667,12 @@
             <a:avLst/>
           </a:prstGeom>
           <a:noFill/>
-          <a:ln/>
         </p:spPr>
         <p:txBody>
           <a:bodyPr wrap="square" lIns="0" tIns="0" rIns="0" bIns="0" rtlCol="0" anchor="ctr"/>
           <a:lstStyle/>
           <a:p>
-            <a:pPr algn="l" indent="0" marL="0">
+            <a:pPr marL="0" indent="0" algn="l">
               <a:buNone/>
             </a:pPr>
             <a:r>
@@ -5857,7 +5707,6 @@
           <a:solidFill>
             <a:srgbClr val="DCE7EE"/>
           </a:solidFill>
-          <a:ln/>
         </p:spPr>
       </p:sp>
       <p:sp>
@@ -5875,13 +5724,12 @@
             <a:avLst/>
           </a:prstGeom>
           <a:noFill/>
-          <a:ln/>
         </p:spPr>
         <p:txBody>
           <a:bodyPr wrap="square" lIns="0" tIns="0" rIns="0" bIns="0" rtlCol="0" anchor="ctr"/>
           <a:lstStyle/>
           <a:p>
-            <a:pPr algn="ctr" indent="0" marL="0">
+            <a:pPr marL="0" indent="0" algn="ctr">
               <a:buNone/>
             </a:pPr>
             <a:r>
@@ -5914,13 +5762,12 @@
             <a:avLst/>
           </a:prstGeom>
           <a:noFill/>
-          <a:ln/>
         </p:spPr>
         <p:txBody>
           <a:bodyPr wrap="square" lIns="0" tIns="0" rIns="0" bIns="0" rtlCol="0" anchor="ctr"/>
           <a:lstStyle/>
           <a:p>
-            <a:pPr algn="l" indent="0" marL="0">
+            <a:pPr marL="0" indent="0" algn="l">
               <a:buNone/>
             </a:pPr>
             <a:r>
@@ -5953,13 +5800,12 @@
             <a:avLst/>
           </a:prstGeom>
           <a:noFill/>
-          <a:ln/>
         </p:spPr>
         <p:txBody>
           <a:bodyPr wrap="square" rtlCol="0" anchor="ctr"/>
           <a:lstStyle/>
           <a:p>
-            <a:pPr algn="r" indent="0" marL="0">
+            <a:pPr marL="0" indent="0" algn="r">
               <a:buNone/>
             </a:pPr>
             <a:r>
@@ -5987,12 +5833,13 @@
 
 <file path=ppt/slides/slide3.xml><?xml version="1.0" encoding="utf-8"?>
 <p:sld xmlns:a="http://schemas.openxmlformats.org/drawingml/2006/main" xmlns:r="http://schemas.openxmlformats.org/officeDocument/2006/relationships" xmlns:p="http://schemas.openxmlformats.org/presentationml/2006/main">
-  <p:cSld name="Slide 3">
+  <p:cSld>
     <p:bg>
       <p:bgPr>
         <a:solidFill>
           <a:srgbClr val="FFFFFF"/>
         </a:solidFill>
+        <a:effectLst/>
       </p:bgPr>
     </p:bg>
     <p:spTree>
@@ -6024,17 +5871,16 @@
             <a:avLst/>
           </a:prstGeom>
           <a:noFill/>
-          <a:ln/>
         </p:spPr>
         <p:txBody>
           <a:bodyPr wrap="square" rtlCol="0" anchor="ctr"/>
           <a:lstStyle/>
           <a:p>
-            <a:pPr indent="0" marL="0">
-              <a:buNone/>
-            </a:pPr>
-            <a:r>
-              <a:rPr lang="en-US" sz="1200" b="1" spc="100" kern="0" dirty="0">
+            <a:pPr marL="0" indent="0">
+              <a:buNone/>
+            </a:pPr>
+            <a:r>
+              <a:rPr lang="en-US" sz="1200" b="1" kern="0" spc="100" dirty="0">
                 <a:solidFill>
                   <a:srgbClr val="3E6E8E"/>
                 </a:solidFill>
@@ -6063,13 +5909,12 @@
             <a:avLst/>
           </a:prstGeom>
           <a:noFill/>
-          <a:ln/>
         </p:spPr>
         <p:txBody>
           <a:bodyPr wrap="square" lIns="0" tIns="0" rIns="0" bIns="0" rtlCol="0" anchor="ctr"/>
           <a:lstStyle/>
           <a:p>
-            <a:pPr indent="0" marL="0">
+            <a:pPr marL="0" indent="0">
               <a:buNone/>
             </a:pPr>
             <a:r>
@@ -6106,7 +5951,6 @@
           <a:solidFill>
             <a:srgbClr val="DCE7EE"/>
           </a:solidFill>
-          <a:ln/>
         </p:spPr>
       </p:sp>
       <p:sp>
@@ -6128,7 +5972,6 @@
           <a:solidFill>
             <a:srgbClr val="3E6E8E"/>
           </a:solidFill>
-          <a:ln/>
         </p:spPr>
       </p:sp>
       <p:sp>
@@ -6146,13 +5989,12 @@
             <a:avLst/>
           </a:prstGeom>
           <a:noFill/>
-          <a:ln/>
         </p:spPr>
         <p:txBody>
           <a:bodyPr wrap="square" lIns="0" tIns="0" rIns="0" bIns="0" rtlCol="0" anchor="ctr"/>
           <a:lstStyle/>
           <a:p>
-            <a:pPr algn="ctr" indent="0" marL="0">
+            <a:pPr marL="0" indent="0" algn="ctr">
               <a:buNone/>
             </a:pPr>
             <a:r>
@@ -6185,13 +6027,12 @@
             <a:avLst/>
           </a:prstGeom>
           <a:noFill/>
-          <a:ln/>
         </p:spPr>
         <p:txBody>
           <a:bodyPr wrap="square" lIns="0" tIns="0" rIns="0" bIns="0" rtlCol="0" anchor="ctr"/>
           <a:lstStyle/>
           <a:p>
-            <a:pPr indent="0" marL="0">
+            <a:pPr marL="0" indent="0">
               <a:buNone/>
             </a:pPr>
             <a:r>
@@ -6224,13 +6065,12 @@
             <a:avLst/>
           </a:prstGeom>
           <a:noFill/>
-          <a:ln/>
         </p:spPr>
         <p:txBody>
           <a:bodyPr wrap="square" lIns="0" tIns="0" rIns="0" bIns="0" rtlCol="0" anchor="ctr"/>
           <a:lstStyle/>
           <a:p>
-            <a:pPr indent="0" marL="0">
+            <a:pPr marL="0" indent="0">
               <a:buNone/>
             </a:pPr>
             <a:r>
@@ -6263,17 +6103,16 @@
             <a:avLst/>
           </a:prstGeom>
           <a:noFill/>
-          <a:ln/>
         </p:spPr>
         <p:txBody>
           <a:bodyPr wrap="square" lIns="0" tIns="0" rIns="0" bIns="0" rtlCol="0" anchor="ctr"/>
           <a:lstStyle/>
           <a:p>
-            <a:pPr indent="0" marL="0">
-              <a:buNone/>
-            </a:pPr>
-            <a:r>
-              <a:rPr lang="en-US" sz="900" b="1" spc="80" kern="0" dirty="0">
+            <a:pPr marL="0" indent="0">
+              <a:buNone/>
+            </a:pPr>
+            <a:r>
+              <a:rPr lang="en-US" sz="900" b="1" kern="0" spc="80" dirty="0">
                 <a:solidFill>
                   <a:srgbClr val="3E6E8E"/>
                 </a:solidFill>
@@ -6302,13 +6141,12 @@
             <a:avLst/>
           </a:prstGeom>
           <a:noFill/>
-          <a:ln/>
         </p:spPr>
         <p:txBody>
           <a:bodyPr wrap="square" lIns="0" tIns="0" rIns="0" bIns="0" rtlCol="0" anchor="ctr"/>
           <a:lstStyle/>
           <a:p>
-            <a:pPr indent="0" marL="0">
+            <a:pPr marL="0" indent="0">
               <a:buNone/>
             </a:pPr>
             <a:r>
@@ -6341,17 +6179,16 @@
             <a:avLst/>
           </a:prstGeom>
           <a:noFill/>
-          <a:ln/>
         </p:spPr>
         <p:txBody>
           <a:bodyPr wrap="square" lIns="0" tIns="0" rIns="0" bIns="0" rtlCol="0" anchor="ctr"/>
           <a:lstStyle/>
           <a:p>
-            <a:pPr indent="0" marL="0">
-              <a:buNone/>
-            </a:pPr>
-            <a:r>
-              <a:rPr lang="en-US" sz="900" b="1" spc="80" kern="0" dirty="0">
+            <a:pPr marL="0" indent="0">
+              <a:buNone/>
+            </a:pPr>
+            <a:r>
+              <a:rPr lang="en-US" sz="900" b="1" kern="0" spc="80" dirty="0">
                 <a:solidFill>
                   <a:srgbClr val="E0A458"/>
                 </a:solidFill>
@@ -6380,13 +6217,12 @@
             <a:avLst/>
           </a:prstGeom>
           <a:noFill/>
-          <a:ln/>
         </p:spPr>
         <p:txBody>
           <a:bodyPr wrap="square" lIns="0" tIns="0" rIns="0" bIns="0" rtlCol="0" anchor="ctr"/>
           <a:lstStyle/>
           <a:p>
-            <a:pPr indent="0" marL="0">
+            <a:pPr marL="0" indent="0">
               <a:buNone/>
             </a:pPr>
             <a:r>
@@ -6423,7 +6259,6 @@
           <a:solidFill>
             <a:srgbClr val="DCE7EE"/>
           </a:solidFill>
-          <a:ln/>
         </p:spPr>
       </p:sp>
       <p:sp>
@@ -6445,7 +6280,6 @@
           <a:solidFill>
             <a:srgbClr val="3E6E8E"/>
           </a:solidFill>
-          <a:ln/>
         </p:spPr>
       </p:sp>
       <p:sp>
@@ -6463,13 +6297,12 @@
             <a:avLst/>
           </a:prstGeom>
           <a:noFill/>
-          <a:ln/>
         </p:spPr>
         <p:txBody>
           <a:bodyPr wrap="square" lIns="0" tIns="0" rIns="0" bIns="0" rtlCol="0" anchor="ctr"/>
           <a:lstStyle/>
           <a:p>
-            <a:pPr algn="ctr" indent="0" marL="0">
+            <a:pPr marL="0" indent="0" algn="ctr">
               <a:buNone/>
             </a:pPr>
             <a:r>
@@ -6502,13 +6335,12 @@
             <a:avLst/>
           </a:prstGeom>
           <a:noFill/>
-          <a:ln/>
         </p:spPr>
         <p:txBody>
           <a:bodyPr wrap="square" lIns="0" tIns="0" rIns="0" bIns="0" rtlCol="0" anchor="ctr"/>
           <a:lstStyle/>
           <a:p>
-            <a:pPr indent="0" marL="0">
+            <a:pPr marL="0" indent="0">
               <a:buNone/>
             </a:pPr>
             <a:r>
@@ -6541,13 +6373,12 @@
             <a:avLst/>
           </a:prstGeom>
           <a:noFill/>
-          <a:ln/>
         </p:spPr>
         <p:txBody>
           <a:bodyPr wrap="square" lIns="0" tIns="0" rIns="0" bIns="0" rtlCol="0" anchor="ctr"/>
           <a:lstStyle/>
           <a:p>
-            <a:pPr indent="0" marL="0">
+            <a:pPr marL="0" indent="0">
               <a:buNone/>
             </a:pPr>
             <a:r>
@@ -6580,17 +6411,16 @@
             <a:avLst/>
           </a:prstGeom>
           <a:noFill/>
-          <a:ln/>
         </p:spPr>
         <p:txBody>
           <a:bodyPr wrap="square" lIns="0" tIns="0" rIns="0" bIns="0" rtlCol="0" anchor="ctr"/>
           <a:lstStyle/>
           <a:p>
-            <a:pPr indent="0" marL="0">
-              <a:buNone/>
-            </a:pPr>
-            <a:r>
-              <a:rPr lang="en-US" sz="900" b="1" spc="80" kern="0" dirty="0">
+            <a:pPr marL="0" indent="0">
+              <a:buNone/>
+            </a:pPr>
+            <a:r>
+              <a:rPr lang="en-US" sz="900" b="1" kern="0" spc="80" dirty="0">
                 <a:solidFill>
                   <a:srgbClr val="3E6E8E"/>
                 </a:solidFill>
@@ -6619,13 +6449,12 @@
             <a:avLst/>
           </a:prstGeom>
           <a:noFill/>
-          <a:ln/>
         </p:spPr>
         <p:txBody>
           <a:bodyPr wrap="square" lIns="0" tIns="0" rIns="0" bIns="0" rtlCol="0" anchor="ctr"/>
           <a:lstStyle/>
           <a:p>
-            <a:pPr indent="0" marL="0">
+            <a:pPr marL="0" indent="0">
               <a:buNone/>
             </a:pPr>
             <a:r>
@@ -6658,17 +6487,16 @@
             <a:avLst/>
           </a:prstGeom>
           <a:noFill/>
-          <a:ln/>
         </p:spPr>
         <p:txBody>
           <a:bodyPr wrap="square" lIns="0" tIns="0" rIns="0" bIns="0" rtlCol="0" anchor="ctr"/>
           <a:lstStyle/>
           <a:p>
-            <a:pPr indent="0" marL="0">
-              <a:buNone/>
-            </a:pPr>
-            <a:r>
-              <a:rPr lang="en-US" sz="900" b="1" spc="80" kern="0" dirty="0">
+            <a:pPr marL="0" indent="0">
+              <a:buNone/>
+            </a:pPr>
+            <a:r>
+              <a:rPr lang="en-US" sz="900" b="1" kern="0" spc="80" dirty="0">
                 <a:solidFill>
                   <a:srgbClr val="E0A458"/>
                 </a:solidFill>
@@ -6697,13 +6525,12 @@
             <a:avLst/>
           </a:prstGeom>
           <a:noFill/>
-          <a:ln/>
         </p:spPr>
         <p:txBody>
           <a:bodyPr wrap="square" lIns="0" tIns="0" rIns="0" bIns="0" rtlCol="0" anchor="ctr"/>
           <a:lstStyle/>
           <a:p>
-            <a:pPr indent="0" marL="0">
+            <a:pPr marL="0" indent="0">
               <a:buNone/>
             </a:pPr>
             <a:r>
@@ -6740,7 +6567,6 @@
           <a:solidFill>
             <a:srgbClr val="F1F4F7"/>
           </a:solidFill>
-          <a:ln/>
         </p:spPr>
       </p:sp>
       <p:sp>
@@ -6762,7 +6588,6 @@
           <a:solidFill>
             <a:srgbClr val="3E6E8E"/>
           </a:solidFill>
-          <a:ln/>
         </p:spPr>
       </p:sp>
       <p:sp>
@@ -6780,13 +6605,12 @@
             <a:avLst/>
           </a:prstGeom>
           <a:noFill/>
-          <a:ln/>
         </p:spPr>
         <p:txBody>
           <a:bodyPr wrap="square" lIns="0" tIns="0" rIns="0" bIns="0" rtlCol="0" anchor="ctr"/>
           <a:lstStyle/>
           <a:p>
-            <a:pPr algn="ctr" indent="0" marL="0">
+            <a:pPr marL="0" indent="0" algn="ctr">
               <a:buNone/>
             </a:pPr>
             <a:r>
@@ -6819,13 +6643,12 @@
             <a:avLst/>
           </a:prstGeom>
           <a:noFill/>
-          <a:ln/>
         </p:spPr>
         <p:txBody>
           <a:bodyPr wrap="square" lIns="0" tIns="0" rIns="0" bIns="0" rtlCol="0" anchor="ctr"/>
           <a:lstStyle/>
           <a:p>
-            <a:pPr indent="0" marL="0">
+            <a:pPr marL="0" indent="0">
               <a:buNone/>
             </a:pPr>
             <a:r>
@@ -6858,13 +6681,12 @@
             <a:avLst/>
           </a:prstGeom>
           <a:noFill/>
-          <a:ln/>
         </p:spPr>
         <p:txBody>
           <a:bodyPr wrap="square" lIns="0" tIns="0" rIns="0" bIns="0" rtlCol="0" anchor="ctr"/>
           <a:lstStyle/>
           <a:p>
-            <a:pPr indent="0" marL="0">
+            <a:pPr marL="0" indent="0">
               <a:buNone/>
             </a:pPr>
             <a:r>
@@ -6897,17 +6719,16 @@
             <a:avLst/>
           </a:prstGeom>
           <a:noFill/>
-          <a:ln/>
         </p:spPr>
         <p:txBody>
           <a:bodyPr wrap="square" lIns="0" tIns="0" rIns="0" bIns="0" rtlCol="0" anchor="ctr"/>
           <a:lstStyle/>
           <a:p>
-            <a:pPr indent="0" marL="0">
-              <a:buNone/>
-            </a:pPr>
-            <a:r>
-              <a:rPr lang="en-US" sz="900" b="1" spc="80" kern="0" dirty="0">
+            <a:pPr marL="0" indent="0">
+              <a:buNone/>
+            </a:pPr>
+            <a:r>
+              <a:rPr lang="en-US" sz="900" b="1" kern="0" spc="80" dirty="0">
                 <a:solidFill>
                   <a:srgbClr val="3E6E8E"/>
                 </a:solidFill>
@@ -6936,13 +6757,12 @@
             <a:avLst/>
           </a:prstGeom>
           <a:noFill/>
-          <a:ln/>
         </p:spPr>
         <p:txBody>
           <a:bodyPr wrap="square" lIns="0" tIns="0" rIns="0" bIns="0" rtlCol="0" anchor="ctr"/>
           <a:lstStyle/>
           <a:p>
-            <a:pPr indent="0" marL="0">
+            <a:pPr marL="0" indent="0">
               <a:buNone/>
             </a:pPr>
             <a:r>
@@ -6975,17 +6795,16 @@
             <a:avLst/>
           </a:prstGeom>
           <a:noFill/>
-          <a:ln/>
         </p:spPr>
         <p:txBody>
           <a:bodyPr wrap="square" lIns="0" tIns="0" rIns="0" bIns="0" rtlCol="0" anchor="ctr"/>
           <a:lstStyle/>
           <a:p>
-            <a:pPr indent="0" marL="0">
-              <a:buNone/>
-            </a:pPr>
-            <a:r>
-              <a:rPr lang="en-US" sz="900" b="1" spc="80" kern="0" dirty="0">
+            <a:pPr marL="0" indent="0">
+              <a:buNone/>
+            </a:pPr>
+            <a:r>
+              <a:rPr lang="en-US" sz="900" b="1" kern="0" spc="80" dirty="0">
                 <a:solidFill>
                   <a:srgbClr val="E0A458"/>
                 </a:solidFill>
@@ -7014,13 +6833,12 @@
             <a:avLst/>
           </a:prstGeom>
           <a:noFill/>
-          <a:ln/>
         </p:spPr>
         <p:txBody>
           <a:bodyPr wrap="square" lIns="0" tIns="0" rIns="0" bIns="0" rtlCol="0" anchor="ctr"/>
           <a:lstStyle/>
           <a:p>
-            <a:pPr indent="0" marL="0">
+            <a:pPr marL="0" indent="0">
               <a:buNone/>
             </a:pPr>
             <a:r>
@@ -7057,7 +6875,6 @@
           <a:solidFill>
             <a:srgbClr val="F1F4F7"/>
           </a:solidFill>
-          <a:ln/>
         </p:spPr>
       </p:sp>
       <p:sp>
@@ -7079,7 +6896,6 @@
           <a:solidFill>
             <a:srgbClr val="3E6E8E"/>
           </a:solidFill>
-          <a:ln/>
         </p:spPr>
       </p:sp>
       <p:sp>
@@ -7097,13 +6913,12 @@
             <a:avLst/>
           </a:prstGeom>
           <a:noFill/>
-          <a:ln/>
         </p:spPr>
         <p:txBody>
           <a:bodyPr wrap="square" lIns="0" tIns="0" rIns="0" bIns="0" rtlCol="0" anchor="ctr"/>
           <a:lstStyle/>
           <a:p>
-            <a:pPr algn="ctr" indent="0" marL="0">
+            <a:pPr marL="0" indent="0" algn="ctr">
               <a:buNone/>
             </a:pPr>
             <a:r>
@@ -7136,13 +6951,12 @@
             <a:avLst/>
           </a:prstGeom>
           <a:noFill/>
-          <a:ln/>
         </p:spPr>
         <p:txBody>
           <a:bodyPr wrap="square" lIns="0" tIns="0" rIns="0" bIns="0" rtlCol="0" anchor="ctr"/>
           <a:lstStyle/>
           <a:p>
-            <a:pPr indent="0" marL="0">
+            <a:pPr marL="0" indent="0">
               <a:buNone/>
             </a:pPr>
             <a:r>
@@ -7175,13 +6989,12 @@
             <a:avLst/>
           </a:prstGeom>
           <a:noFill/>
-          <a:ln/>
         </p:spPr>
         <p:txBody>
           <a:bodyPr wrap="square" lIns="0" tIns="0" rIns="0" bIns="0" rtlCol="0" anchor="ctr"/>
           <a:lstStyle/>
           <a:p>
-            <a:pPr indent="0" marL="0">
+            <a:pPr marL="0" indent="0">
               <a:buNone/>
             </a:pPr>
             <a:r>
@@ -7214,17 +7027,16 @@
             <a:avLst/>
           </a:prstGeom>
           <a:noFill/>
-          <a:ln/>
         </p:spPr>
         <p:txBody>
           <a:bodyPr wrap="square" lIns="0" tIns="0" rIns="0" bIns="0" rtlCol="0" anchor="ctr"/>
           <a:lstStyle/>
           <a:p>
-            <a:pPr indent="0" marL="0">
-              <a:buNone/>
-            </a:pPr>
-            <a:r>
-              <a:rPr lang="en-US" sz="900" b="1" spc="80" kern="0" dirty="0">
+            <a:pPr marL="0" indent="0">
+              <a:buNone/>
+            </a:pPr>
+            <a:r>
+              <a:rPr lang="en-US" sz="900" b="1" kern="0" spc="80" dirty="0">
                 <a:solidFill>
                   <a:srgbClr val="3E6E8E"/>
                 </a:solidFill>
@@ -7253,13 +7065,12 @@
             <a:avLst/>
           </a:prstGeom>
           <a:noFill/>
-          <a:ln/>
         </p:spPr>
         <p:txBody>
           <a:bodyPr wrap="square" lIns="0" tIns="0" rIns="0" bIns="0" rtlCol="0" anchor="ctr"/>
           <a:lstStyle/>
           <a:p>
-            <a:pPr indent="0" marL="0">
+            <a:pPr marL="0" indent="0">
               <a:buNone/>
             </a:pPr>
             <a:r>
@@ -7292,17 +7103,16 @@
             <a:avLst/>
           </a:prstGeom>
           <a:noFill/>
-          <a:ln/>
         </p:spPr>
         <p:txBody>
           <a:bodyPr wrap="square" lIns="0" tIns="0" rIns="0" bIns="0" rtlCol="0" anchor="ctr"/>
           <a:lstStyle/>
           <a:p>
-            <a:pPr indent="0" marL="0">
-              <a:buNone/>
-            </a:pPr>
-            <a:r>
-              <a:rPr lang="en-US" sz="900" b="1" spc="80" kern="0" dirty="0">
+            <a:pPr marL="0" indent="0">
+              <a:buNone/>
+            </a:pPr>
+            <a:r>
+              <a:rPr lang="en-US" sz="900" b="1" kern="0" spc="80" dirty="0">
                 <a:solidFill>
                   <a:srgbClr val="E0A458"/>
                 </a:solidFill>
@@ -7331,13 +7141,12 @@
             <a:avLst/>
           </a:prstGeom>
           <a:noFill/>
-          <a:ln/>
         </p:spPr>
         <p:txBody>
           <a:bodyPr wrap="square" lIns="0" tIns="0" rIns="0" bIns="0" rtlCol="0" anchor="ctr"/>
           <a:lstStyle/>
           <a:p>
-            <a:pPr indent="0" marL="0">
+            <a:pPr marL="0" indent="0">
               <a:buNone/>
             </a:pPr>
             <a:r>
@@ -7374,7 +7183,6 @@
           <a:solidFill>
             <a:srgbClr val="F1F4F7"/>
           </a:solidFill>
-          <a:ln/>
         </p:spPr>
       </p:sp>
       <p:sp>
@@ -7396,7 +7204,6 @@
           <a:solidFill>
             <a:srgbClr val="3E6E8E"/>
           </a:solidFill>
-          <a:ln/>
         </p:spPr>
       </p:sp>
       <p:sp>
@@ -7414,13 +7221,12 @@
             <a:avLst/>
           </a:prstGeom>
           <a:noFill/>
-          <a:ln/>
         </p:spPr>
         <p:txBody>
           <a:bodyPr wrap="square" lIns="0" tIns="0" rIns="0" bIns="0" rtlCol="0" anchor="ctr"/>
           <a:lstStyle/>
           <a:p>
-            <a:pPr algn="ctr" indent="0" marL="0">
+            <a:pPr marL="0" indent="0" algn="ctr">
               <a:buNone/>
             </a:pPr>
             <a:r>
@@ -7453,13 +7259,12 @@
             <a:avLst/>
           </a:prstGeom>
           <a:noFill/>
-          <a:ln/>
         </p:spPr>
         <p:txBody>
           <a:bodyPr wrap="square" lIns="0" tIns="0" rIns="0" bIns="0" rtlCol="0" anchor="ctr"/>
           <a:lstStyle/>
           <a:p>
-            <a:pPr indent="0" marL="0">
+            <a:pPr marL="0" indent="0">
               <a:buNone/>
             </a:pPr>
             <a:r>
@@ -7492,13 +7297,12 @@
             <a:avLst/>
           </a:prstGeom>
           <a:noFill/>
-          <a:ln/>
         </p:spPr>
         <p:txBody>
           <a:bodyPr wrap="square" lIns="0" tIns="0" rIns="0" bIns="0" rtlCol="0" anchor="ctr"/>
           <a:lstStyle/>
           <a:p>
-            <a:pPr indent="0" marL="0">
+            <a:pPr marL="0" indent="0">
               <a:buNone/>
             </a:pPr>
             <a:r>
@@ -7531,17 +7335,16 @@
             <a:avLst/>
           </a:prstGeom>
           <a:noFill/>
-          <a:ln/>
         </p:spPr>
         <p:txBody>
           <a:bodyPr wrap="square" lIns="0" tIns="0" rIns="0" bIns="0" rtlCol="0" anchor="ctr"/>
           <a:lstStyle/>
           <a:p>
-            <a:pPr indent="0" marL="0">
-              <a:buNone/>
-            </a:pPr>
-            <a:r>
-              <a:rPr lang="en-US" sz="900" b="1" spc="80" kern="0" dirty="0">
+            <a:pPr marL="0" indent="0">
+              <a:buNone/>
+            </a:pPr>
+            <a:r>
+              <a:rPr lang="en-US" sz="900" b="1" kern="0" spc="80" dirty="0">
                 <a:solidFill>
                   <a:srgbClr val="3E6E8E"/>
                 </a:solidFill>
@@ -7570,13 +7373,12 @@
             <a:avLst/>
           </a:prstGeom>
           <a:noFill/>
-          <a:ln/>
         </p:spPr>
         <p:txBody>
           <a:bodyPr wrap="square" lIns="0" tIns="0" rIns="0" bIns="0" rtlCol="0" anchor="ctr"/>
           <a:lstStyle/>
           <a:p>
-            <a:pPr indent="0" marL="0">
+            <a:pPr marL="0" indent="0">
               <a:buNone/>
             </a:pPr>
             <a:r>
@@ -7609,17 +7411,16 @@
             <a:avLst/>
           </a:prstGeom>
           <a:noFill/>
-          <a:ln/>
         </p:spPr>
         <p:txBody>
           <a:bodyPr wrap="square" lIns="0" tIns="0" rIns="0" bIns="0" rtlCol="0" anchor="ctr"/>
           <a:lstStyle/>
           <a:p>
-            <a:pPr indent="0" marL="0">
-              <a:buNone/>
-            </a:pPr>
-            <a:r>
-              <a:rPr lang="en-US" sz="900" b="1" spc="80" kern="0" dirty="0">
+            <a:pPr marL="0" indent="0">
+              <a:buNone/>
+            </a:pPr>
+            <a:r>
+              <a:rPr lang="en-US" sz="900" b="1" kern="0" spc="80" dirty="0">
                 <a:solidFill>
                   <a:srgbClr val="E0A458"/>
                 </a:solidFill>
@@ -7648,13 +7449,12 @@
             <a:avLst/>
           </a:prstGeom>
           <a:noFill/>
-          <a:ln/>
         </p:spPr>
         <p:txBody>
           <a:bodyPr wrap="square" lIns="0" tIns="0" rIns="0" bIns="0" rtlCol="0" anchor="ctr"/>
           <a:lstStyle/>
           <a:p>
-            <a:pPr indent="0" marL="0">
+            <a:pPr marL="0" indent="0">
               <a:buNone/>
             </a:pPr>
             <a:r>
@@ -7687,13 +7487,12 @@
             <a:avLst/>
           </a:prstGeom>
           <a:noFill/>
-          <a:ln/>
         </p:spPr>
         <p:txBody>
           <a:bodyPr wrap="square" rtlCol="0" anchor="ctr"/>
           <a:lstStyle/>
           <a:p>
-            <a:pPr indent="0" marL="0">
+            <a:pPr marL="0" indent="0">
               <a:buNone/>
             </a:pPr>
             <a:r>
@@ -7726,13 +7525,12 @@
             <a:avLst/>
           </a:prstGeom>
           <a:noFill/>
-          <a:ln/>
         </p:spPr>
         <p:txBody>
           <a:bodyPr wrap="square" rtlCol="0" anchor="ctr"/>
           <a:lstStyle/>
           <a:p>
-            <a:pPr algn="r" indent="0" marL="0">
+            <a:pPr marL="0" indent="0" algn="r">
               <a:buNone/>
             </a:pPr>
             <a:r>
@@ -7760,12 +7558,13 @@
 
 <file path=ppt/slides/slide4.xml><?xml version="1.0" encoding="utf-8"?>
 <p:sld xmlns:a="http://schemas.openxmlformats.org/drawingml/2006/main" xmlns:r="http://schemas.openxmlformats.org/officeDocument/2006/relationships" xmlns:p="http://schemas.openxmlformats.org/presentationml/2006/main">
-  <p:cSld name="Slide 4">
+  <p:cSld>
     <p:bg>
       <p:bgPr>
         <a:solidFill>
           <a:srgbClr val="FFFFFF"/>
         </a:solidFill>
+        <a:effectLst/>
       </p:bgPr>
     </p:bg>
     <p:spTree>
@@ -7797,17 +7596,16 @@
             <a:avLst/>
           </a:prstGeom>
           <a:noFill/>
-          <a:ln/>
         </p:spPr>
         <p:txBody>
           <a:bodyPr wrap="square" rtlCol="0" anchor="ctr"/>
           <a:lstStyle/>
           <a:p>
-            <a:pPr indent="0" marL="0">
-              <a:buNone/>
-            </a:pPr>
-            <a:r>
-              <a:rPr lang="en-US" sz="1200" b="1" spc="100" kern="0" dirty="0">
+            <a:pPr marL="0" indent="0">
+              <a:buNone/>
+            </a:pPr>
+            <a:r>
+              <a:rPr lang="en-US" sz="1200" b="1" kern="0" spc="100" dirty="0">
                 <a:solidFill>
                   <a:srgbClr val="3E6E8E"/>
                 </a:solidFill>
@@ -7836,13 +7634,12 @@
             <a:avLst/>
           </a:prstGeom>
           <a:noFill/>
-          <a:ln/>
         </p:spPr>
         <p:txBody>
           <a:bodyPr wrap="square" lIns="0" tIns="0" rIns="0" bIns="0" rtlCol="0" anchor="ctr"/>
           <a:lstStyle/>
           <a:p>
-            <a:pPr indent="0" marL="0">
+            <a:pPr marL="0" indent="0">
               <a:buNone/>
             </a:pPr>
             <a:r>
@@ -7875,13 +7672,12 @@
             <a:avLst/>
           </a:prstGeom>
           <a:noFill/>
-          <a:ln/>
         </p:spPr>
         <p:txBody>
           <a:bodyPr wrap="square" rtlCol="0" anchor="ctr"/>
           <a:lstStyle/>
           <a:p>
-            <a:pPr indent="0" marL="0">
+            <a:pPr marL="0" indent="0">
               <a:buNone/>
             </a:pPr>
             <a:r>
@@ -7914,17 +7710,16 @@
             <a:avLst/>
           </a:prstGeom>
           <a:noFill/>
-          <a:ln/>
         </p:spPr>
         <p:txBody>
           <a:bodyPr wrap="square" rtlCol="0" anchor="ctr"/>
           <a:lstStyle/>
           <a:p>
-            <a:pPr indent="0" marL="0">
-              <a:buNone/>
-            </a:pPr>
-            <a:r>
-              <a:rPr lang="en-US" sz="1050" b="1" spc="80" kern="0" dirty="0">
+            <a:pPr marL="0" indent="0">
+              <a:buNone/>
+            </a:pPr>
+            <a:r>
+              <a:rPr lang="en-US" sz="1050" b="1" kern="0" spc="80" dirty="0">
                 <a:solidFill>
                   <a:srgbClr val="3E6E8E"/>
                 </a:solidFill>
@@ -7953,17 +7748,16 @@
             <a:avLst/>
           </a:prstGeom>
           <a:noFill/>
-          <a:ln/>
         </p:spPr>
         <p:txBody>
           <a:bodyPr wrap="square" rtlCol="0" anchor="ctr"/>
           <a:lstStyle/>
           <a:p>
-            <a:pPr indent="0" marL="0">
-              <a:buNone/>
-            </a:pPr>
-            <a:r>
-              <a:rPr lang="en-US" sz="1050" b="1" spc="80" kern="0" dirty="0">
+            <a:pPr marL="0" indent="0">
+              <a:buNone/>
+            </a:pPr>
+            <a:r>
+              <a:rPr lang="en-US" sz="1050" b="1" kern="0" spc="80" dirty="0">
                 <a:solidFill>
                   <a:srgbClr val="3E6E8E"/>
                 </a:solidFill>
@@ -7992,17 +7786,16 @@
             <a:avLst/>
           </a:prstGeom>
           <a:noFill/>
-          <a:ln/>
         </p:spPr>
         <p:txBody>
           <a:bodyPr wrap="square" rtlCol="0" anchor="ctr"/>
           <a:lstStyle/>
           <a:p>
-            <a:pPr indent="0" marL="0">
-              <a:buNone/>
-            </a:pPr>
-            <a:r>
-              <a:rPr lang="en-US" sz="1050" b="1" spc="80" kern="0" dirty="0">
+            <a:pPr marL="0" indent="0">
+              <a:buNone/>
+            </a:pPr>
+            <a:r>
+              <a:rPr lang="en-US" sz="1050" b="1" kern="0" spc="80" dirty="0">
                 <a:solidFill>
                   <a:srgbClr val="3E6E8E"/>
                 </a:solidFill>
@@ -8033,7 +7826,6 @@
           <a:solidFill>
             <a:srgbClr val="F5F7F9"/>
           </a:solidFill>
-          <a:ln/>
         </p:spPr>
       </p:sp>
       <p:sp>
@@ -8051,13 +7843,12 @@
             <a:avLst/>
           </a:prstGeom>
           <a:noFill/>
-          <a:ln/>
         </p:spPr>
         <p:txBody>
           <a:bodyPr wrap="square" rtlCol="0" anchor="ctr"/>
           <a:lstStyle/>
           <a:p>
-            <a:pPr indent="0" marL="0">
+            <a:pPr marL="0" indent="0">
               <a:buNone/>
             </a:pPr>
             <a:r>
@@ -8090,13 +7881,12 @@
             <a:avLst/>
           </a:prstGeom>
           <a:noFill/>
-          <a:ln/>
         </p:spPr>
         <p:txBody>
           <a:bodyPr wrap="square" rtlCol="0" anchor="ctr"/>
           <a:lstStyle/>
           <a:p>
-            <a:pPr indent="0" marL="0">
+            <a:pPr marL="0" indent="0">
               <a:buNone/>
             </a:pPr>
             <a:r>
@@ -8133,7 +7923,6 @@
           <a:solidFill>
             <a:srgbClr val="C97A4A"/>
           </a:solidFill>
-          <a:ln/>
         </p:spPr>
       </p:sp>
       <p:sp>
@@ -8151,13 +7940,12 @@
             <a:avLst/>
           </a:prstGeom>
           <a:noFill/>
-          <a:ln/>
         </p:spPr>
         <p:txBody>
           <a:bodyPr wrap="square" lIns="0" tIns="0" rIns="0" bIns="0" rtlCol="0" anchor="ctr"/>
           <a:lstStyle/>
           <a:p>
-            <a:pPr algn="ctr" indent="0" marL="0">
+            <a:pPr marL="0" indent="0" algn="ctr">
               <a:buNone/>
             </a:pPr>
             <a:r>
@@ -8190,13 +7978,12 @@
             <a:avLst/>
           </a:prstGeom>
           <a:noFill/>
-          <a:ln/>
         </p:spPr>
         <p:txBody>
           <a:bodyPr wrap="square" rtlCol="0" anchor="ctr"/>
           <a:lstStyle/>
           <a:p>
-            <a:pPr indent="0" marL="0">
+            <a:pPr marL="0" indent="0">
               <a:buNone/>
             </a:pPr>
             <a:r>
@@ -8229,13 +8016,12 @@
             <a:avLst/>
           </a:prstGeom>
           <a:noFill/>
-          <a:ln/>
         </p:spPr>
         <p:txBody>
           <a:bodyPr wrap="square" rtlCol="0" anchor="ctr"/>
           <a:lstStyle/>
           <a:p>
-            <a:pPr indent="0" marL="0">
+            <a:pPr marL="0" indent="0">
               <a:buNone/>
             </a:pPr>
             <a:r>
@@ -8272,7 +8058,6 @@
           <a:solidFill>
             <a:srgbClr val="5B8C6E"/>
           </a:solidFill>
-          <a:ln/>
         </p:spPr>
       </p:sp>
       <p:sp>
@@ -8290,13 +8075,12 @@
             <a:avLst/>
           </a:prstGeom>
           <a:noFill/>
-          <a:ln/>
         </p:spPr>
         <p:txBody>
           <a:bodyPr wrap="square" lIns="0" tIns="0" rIns="0" bIns="0" rtlCol="0" anchor="ctr"/>
           <a:lstStyle/>
           <a:p>
-            <a:pPr algn="ctr" indent="0" marL="0">
+            <a:pPr marL="0" indent="0" algn="ctr">
               <a:buNone/>
             </a:pPr>
             <a:r>
@@ -8331,7 +8115,6 @@
           <a:solidFill>
             <a:srgbClr val="F5F7F9"/>
           </a:solidFill>
-          <a:ln/>
         </p:spPr>
       </p:sp>
       <p:sp>
@@ -8349,13 +8132,12 @@
             <a:avLst/>
           </a:prstGeom>
           <a:noFill/>
-          <a:ln/>
         </p:spPr>
         <p:txBody>
           <a:bodyPr wrap="square" rtlCol="0" anchor="ctr"/>
           <a:lstStyle/>
           <a:p>
-            <a:pPr indent="0" marL="0">
+            <a:pPr marL="0" indent="0">
               <a:buNone/>
             </a:pPr>
             <a:r>
@@ -8388,13 +8170,12 @@
             <a:avLst/>
           </a:prstGeom>
           <a:noFill/>
-          <a:ln/>
         </p:spPr>
         <p:txBody>
           <a:bodyPr wrap="square" rtlCol="0" anchor="ctr"/>
           <a:lstStyle/>
           <a:p>
-            <a:pPr indent="0" marL="0">
+            <a:pPr marL="0" indent="0">
               <a:buNone/>
             </a:pPr>
             <a:r>
@@ -8431,7 +8212,6 @@
           <a:solidFill>
             <a:srgbClr val="E0A458"/>
           </a:solidFill>
-          <a:ln/>
         </p:spPr>
       </p:sp>
       <p:sp>
@@ -8449,13 +8229,12 @@
             <a:avLst/>
           </a:prstGeom>
           <a:noFill/>
-          <a:ln/>
         </p:spPr>
         <p:txBody>
           <a:bodyPr wrap="square" lIns="0" tIns="0" rIns="0" bIns="0" rtlCol="0" anchor="ctr"/>
           <a:lstStyle/>
           <a:p>
-            <a:pPr algn="ctr" indent="0" marL="0">
+            <a:pPr marL="0" indent="0" algn="ctr">
               <a:buNone/>
             </a:pPr>
             <a:r>
@@ -8488,13 +8267,12 @@
             <a:avLst/>
           </a:prstGeom>
           <a:noFill/>
-          <a:ln/>
         </p:spPr>
         <p:txBody>
           <a:bodyPr wrap="square" rtlCol="0" anchor="ctr"/>
           <a:lstStyle/>
           <a:p>
-            <a:pPr indent="0" marL="0">
+            <a:pPr marL="0" indent="0">
               <a:buNone/>
             </a:pPr>
             <a:r>
@@ -8527,13 +8305,12 @@
             <a:avLst/>
           </a:prstGeom>
           <a:noFill/>
-          <a:ln/>
         </p:spPr>
         <p:txBody>
           <a:bodyPr wrap="square" rtlCol="0" anchor="ctr"/>
           <a:lstStyle/>
           <a:p>
-            <a:pPr indent="0" marL="0">
+            <a:pPr marL="0" indent="0">
               <a:buNone/>
             </a:pPr>
             <a:r>
@@ -8570,7 +8347,6 @@
           <a:solidFill>
             <a:srgbClr val="E0A458"/>
           </a:solidFill>
-          <a:ln/>
         </p:spPr>
       </p:sp>
       <p:sp>
@@ -8588,13 +8364,12 @@
             <a:avLst/>
           </a:prstGeom>
           <a:noFill/>
-          <a:ln/>
         </p:spPr>
         <p:txBody>
           <a:bodyPr wrap="square" lIns="0" tIns="0" rIns="0" bIns="0" rtlCol="0" anchor="ctr"/>
           <a:lstStyle/>
           <a:p>
-            <a:pPr algn="ctr" indent="0" marL="0">
+            <a:pPr marL="0" indent="0" algn="ctr">
               <a:buNone/>
             </a:pPr>
             <a:r>
@@ -8629,7 +8404,6 @@
           <a:solidFill>
             <a:srgbClr val="F5F7F9"/>
           </a:solidFill>
-          <a:ln/>
         </p:spPr>
       </p:sp>
       <p:sp>
@@ -8647,13 +8421,12 @@
             <a:avLst/>
           </a:prstGeom>
           <a:noFill/>
-          <a:ln/>
         </p:spPr>
         <p:txBody>
           <a:bodyPr wrap="square" rtlCol="0" anchor="ctr"/>
           <a:lstStyle/>
           <a:p>
-            <a:pPr indent="0" marL="0">
+            <a:pPr marL="0" indent="0">
               <a:buNone/>
             </a:pPr>
             <a:r>
@@ -8686,13 +8459,12 @@
             <a:avLst/>
           </a:prstGeom>
           <a:noFill/>
-          <a:ln/>
         </p:spPr>
         <p:txBody>
           <a:bodyPr wrap="square" rtlCol="0" anchor="ctr"/>
           <a:lstStyle/>
           <a:p>
-            <a:pPr indent="0" marL="0">
+            <a:pPr marL="0" indent="0">
               <a:buNone/>
             </a:pPr>
             <a:r>
@@ -8729,7 +8501,6 @@
           <a:solidFill>
             <a:srgbClr val="C97A4A"/>
           </a:solidFill>
-          <a:ln/>
         </p:spPr>
       </p:sp>
       <p:sp>
@@ -8747,13 +8518,12 @@
             <a:avLst/>
           </a:prstGeom>
           <a:noFill/>
-          <a:ln/>
         </p:spPr>
         <p:txBody>
           <a:bodyPr wrap="square" lIns="0" tIns="0" rIns="0" bIns="0" rtlCol="0" anchor="ctr"/>
           <a:lstStyle/>
           <a:p>
-            <a:pPr algn="ctr" indent="0" marL="0">
+            <a:pPr marL="0" indent="0" algn="ctr">
               <a:buNone/>
             </a:pPr>
             <a:r>
@@ -8786,13 +8556,12 @@
             <a:avLst/>
           </a:prstGeom>
           <a:noFill/>
-          <a:ln/>
         </p:spPr>
         <p:txBody>
           <a:bodyPr wrap="square" rtlCol="0" anchor="ctr"/>
           <a:lstStyle/>
           <a:p>
-            <a:pPr indent="0" marL="0">
+            <a:pPr marL="0" indent="0">
               <a:buNone/>
             </a:pPr>
             <a:r>
@@ -8825,13 +8594,12 @@
             <a:avLst/>
           </a:prstGeom>
           <a:noFill/>
-          <a:ln/>
         </p:spPr>
         <p:txBody>
           <a:bodyPr wrap="square" rtlCol="0" anchor="ctr"/>
           <a:lstStyle/>
           <a:p>
-            <a:pPr indent="0" marL="0">
+            <a:pPr marL="0" indent="0">
               <a:buNone/>
             </a:pPr>
             <a:r>
@@ -8868,7 +8636,6 @@
           <a:solidFill>
             <a:srgbClr val="5B6B80"/>
           </a:solidFill>
-          <a:ln/>
         </p:spPr>
       </p:sp>
       <p:sp>
@@ -8886,13 +8653,12 @@
             <a:avLst/>
           </a:prstGeom>
           <a:noFill/>
-          <a:ln/>
         </p:spPr>
         <p:txBody>
           <a:bodyPr wrap="square" lIns="0" tIns="0" rIns="0" bIns="0" rtlCol="0" anchor="ctr"/>
           <a:lstStyle/>
           <a:p>
-            <a:pPr algn="ctr" indent="0" marL="0">
+            <a:pPr marL="0" indent="0" algn="ctr">
               <a:buNone/>
             </a:pPr>
             <a:r>
@@ -8925,13 +8691,12 @@
             <a:avLst/>
           </a:prstGeom>
           <a:noFill/>
-          <a:ln/>
         </p:spPr>
         <p:txBody>
           <a:bodyPr wrap="square" rtlCol="0" anchor="ctr"/>
           <a:lstStyle/>
           <a:p>
-            <a:pPr indent="0" marL="0">
+            <a:pPr marL="0" indent="0">
               <a:buNone/>
             </a:pPr>
             <a:r>
@@ -8964,13 +8729,12 @@
             <a:avLst/>
           </a:prstGeom>
           <a:noFill/>
-          <a:ln/>
         </p:spPr>
         <p:txBody>
           <a:bodyPr wrap="square" rtlCol="0" anchor="ctr"/>
           <a:lstStyle/>
           <a:p>
-            <a:pPr algn="r" indent="0" marL="0">
+            <a:pPr marL="0" indent="0" algn="r">
               <a:buNone/>
             </a:pPr>
             <a:r>
@@ -8998,12 +8762,13 @@
 
 <file path=ppt/slides/slide5.xml><?xml version="1.0" encoding="utf-8"?>
 <p:sld xmlns:a="http://schemas.openxmlformats.org/drawingml/2006/main" xmlns:r="http://schemas.openxmlformats.org/officeDocument/2006/relationships" xmlns:p="http://schemas.openxmlformats.org/presentationml/2006/main">
-  <p:cSld name="Slide 5">
+  <p:cSld>
     <p:bg>
       <p:bgPr>
         <a:solidFill>
           <a:srgbClr val="FFFFFF"/>
         </a:solidFill>
+        <a:effectLst/>
       </p:bgPr>
     </p:bg>
     <p:spTree>
@@ -9035,17 +8800,16 @@
             <a:avLst/>
           </a:prstGeom>
           <a:noFill/>
-          <a:ln/>
         </p:spPr>
         <p:txBody>
           <a:bodyPr wrap="square" rtlCol="0" anchor="ctr"/>
           <a:lstStyle/>
           <a:p>
-            <a:pPr indent="0" marL="0">
-              <a:buNone/>
-            </a:pPr>
-            <a:r>
-              <a:rPr lang="en-US" sz="1200" b="1" spc="100" kern="0" dirty="0">
+            <a:pPr marL="0" indent="0">
+              <a:buNone/>
+            </a:pPr>
+            <a:r>
+              <a:rPr lang="en-US" sz="1200" b="1" kern="0" spc="100" dirty="0">
                 <a:solidFill>
                   <a:srgbClr val="3E6E8E"/>
                 </a:solidFill>
@@ -9074,13 +8838,12 @@
             <a:avLst/>
           </a:prstGeom>
           <a:noFill/>
-          <a:ln/>
         </p:spPr>
         <p:txBody>
           <a:bodyPr wrap="square" lIns="0" tIns="0" rIns="0" bIns="0" rtlCol="0" anchor="ctr"/>
           <a:lstStyle/>
           <a:p>
-            <a:pPr indent="0" marL="0">
+            <a:pPr marL="0" indent="0">
               <a:buNone/>
             </a:pPr>
             <a:r>
@@ -9117,7 +8880,6 @@
           <a:solidFill>
             <a:srgbClr val="DCE7EE"/>
           </a:solidFill>
-          <a:ln/>
         </p:spPr>
       </p:sp>
       <p:sp>
@@ -9135,13 +8897,12 @@
             <a:avLst/>
           </a:prstGeom>
           <a:noFill/>
-          <a:ln/>
         </p:spPr>
         <p:txBody>
           <a:bodyPr wrap="square" lIns="0" tIns="0" rIns="0" bIns="0" rtlCol="0" anchor="ctr"/>
           <a:lstStyle/>
           <a:p>
-            <a:pPr algn="l" indent="0" marL="0">
+            <a:pPr marL="0" indent="0" algn="l">
               <a:buNone/>
             </a:pPr>
             <a:r>
@@ -9174,13 +8935,12 @@
             <a:avLst/>
           </a:prstGeom>
           <a:noFill/>
-          <a:ln/>
         </p:spPr>
         <p:txBody>
           <a:bodyPr wrap="square" lIns="0" tIns="0" rIns="0" bIns="0" rtlCol="0" anchor="t"/>
           <a:lstStyle/>
           <a:p>
-            <a:pPr algn="l" indent="0" marL="0">
+            <a:pPr marL="0" indent="0" algn="l">
               <a:buNone/>
             </a:pPr>
             <a:r>
@@ -9217,7 +8977,6 @@
           <a:solidFill>
             <a:srgbClr val="DCE7EE"/>
           </a:solidFill>
-          <a:ln/>
         </p:spPr>
       </p:sp>
       <p:sp>
@@ -9235,13 +8994,12 @@
             <a:avLst/>
           </a:prstGeom>
           <a:noFill/>
-          <a:ln/>
         </p:spPr>
         <p:txBody>
           <a:bodyPr wrap="square" lIns="0" tIns="0" rIns="0" bIns="0" rtlCol="0" anchor="ctr"/>
           <a:lstStyle/>
           <a:p>
-            <a:pPr algn="l" indent="0" marL="0">
+            <a:pPr marL="0" indent="0" algn="l">
               <a:buNone/>
             </a:pPr>
             <a:r>
@@ -9274,13 +9032,12 @@
             <a:avLst/>
           </a:prstGeom>
           <a:noFill/>
-          <a:ln/>
         </p:spPr>
         <p:txBody>
           <a:bodyPr wrap="square" lIns="0" tIns="0" rIns="0" bIns="0" rtlCol="0" anchor="t"/>
           <a:lstStyle/>
           <a:p>
-            <a:pPr algn="l" indent="0" marL="0">
+            <a:pPr marL="0" indent="0" algn="l">
               <a:buNone/>
             </a:pPr>
             <a:r>
@@ -9317,7 +9074,6 @@
           <a:solidFill>
             <a:srgbClr val="E4EEE7"/>
           </a:solidFill>
-          <a:ln/>
         </p:spPr>
       </p:sp>
       <p:sp>
@@ -9335,13 +9091,12 @@
             <a:avLst/>
           </a:prstGeom>
           <a:noFill/>
-          <a:ln/>
         </p:spPr>
         <p:txBody>
           <a:bodyPr wrap="square" lIns="0" tIns="0" rIns="0" bIns="0" rtlCol="0" anchor="ctr"/>
           <a:lstStyle/>
           <a:p>
-            <a:pPr algn="l" indent="0" marL="0">
+            <a:pPr marL="0" indent="0" algn="l">
               <a:buNone/>
             </a:pPr>
             <a:r>
@@ -9374,13 +9129,12 @@
             <a:avLst/>
           </a:prstGeom>
           <a:noFill/>
-          <a:ln/>
         </p:spPr>
         <p:txBody>
           <a:bodyPr wrap="square" lIns="0" tIns="0" rIns="0" bIns="0" rtlCol="0" anchor="t"/>
           <a:lstStyle/>
           <a:p>
-            <a:pPr algn="l" indent="0" marL="0">
+            <a:pPr marL="0" indent="0" algn="l">
               <a:buNone/>
             </a:pPr>
             <a:r>
@@ -9417,7 +9171,6 @@
           <a:solidFill>
             <a:srgbClr val="F3E4D8"/>
           </a:solidFill>
-          <a:ln/>
         </p:spPr>
       </p:sp>
       <p:sp>
@@ -9435,13 +9188,12 @@
             <a:avLst/>
           </a:prstGeom>
           <a:noFill/>
-          <a:ln/>
         </p:spPr>
         <p:txBody>
           <a:bodyPr wrap="square" lIns="0" tIns="0" rIns="0" bIns="0" rtlCol="0" anchor="ctr"/>
           <a:lstStyle/>
           <a:p>
-            <a:pPr algn="l" indent="0" marL="0">
+            <a:pPr marL="0" indent="0" algn="l">
               <a:buNone/>
             </a:pPr>
             <a:r>
@@ -9474,13 +9226,12 @@
             <a:avLst/>
           </a:prstGeom>
           <a:noFill/>
-          <a:ln/>
         </p:spPr>
         <p:txBody>
           <a:bodyPr wrap="square" lIns="0" tIns="0" rIns="0" bIns="0" rtlCol="0" anchor="t"/>
           <a:lstStyle/>
           <a:p>
-            <a:pPr algn="l" indent="0" marL="0">
+            <a:pPr marL="0" indent="0" algn="l">
               <a:buNone/>
             </a:pPr>
             <a:r>
@@ -9500,7 +9251,7 @@
       </p:sp>
       <p:graphicFrame>
         <p:nvGraphicFramePr>
-          <p:cNvPr id="16" name="Chart 0" descr=""/>
+          <p:cNvPr id="16" name="Chart 0"/>
           <p:cNvGraphicFramePr/>
           <p:nvPr/>
         </p:nvGraphicFramePr>
@@ -9508,9 +9259,9 @@
           <a:off x="548640" y="3520440"/>
           <a:ext cx="5029200" cy="2651760"/>
         </p:xfrm>
-        <a:graphic xmlns:a="http://schemas.openxmlformats.org/drawingml/2006/main">
+        <a:graphic>
           <a:graphicData uri="http://schemas.openxmlformats.org/drawingml/2006/chart">
-            <c:chart xmlns:c="http://schemas.openxmlformats.org/drawingml/2006/chart" r:id="rId1"/>
+            <c:chart xmlns:c="http://schemas.openxmlformats.org/drawingml/2006/chart" xmlns:r="http://schemas.openxmlformats.org/officeDocument/2006/relationships" r:id="rId1"/>
           </a:graphicData>
         </a:graphic>
       </p:graphicFrame>
@@ -9529,7 +9280,6 @@
             <a:avLst/>
           </a:prstGeom>
           <a:noFill/>
-          <a:ln/>
         </p:spPr>
         <p:txBody>
           <a:bodyPr wrap="square" rtlCol="0" anchor="t"/>
@@ -9614,13 +9364,12 @@
             <a:avLst/>
           </a:prstGeom>
           <a:noFill/>
-          <a:ln/>
         </p:spPr>
         <p:txBody>
           <a:bodyPr wrap="square" rtlCol="0" anchor="ctr"/>
           <a:lstStyle/>
           <a:p>
-            <a:pPr algn="r" indent="0" marL="0">
+            <a:pPr marL="0" indent="0" algn="r">
               <a:buNone/>
             </a:pPr>
             <a:r>
@@ -9648,12 +9397,13 @@
 
 <file path=ppt/slides/slide6.xml><?xml version="1.0" encoding="utf-8"?>
 <p:sld xmlns:a="http://schemas.openxmlformats.org/drawingml/2006/main" xmlns:r="http://schemas.openxmlformats.org/officeDocument/2006/relationships" xmlns:p="http://schemas.openxmlformats.org/presentationml/2006/main">
-  <p:cSld name="Slide 6">
+  <p:cSld>
     <p:bg>
       <p:bgPr>
         <a:solidFill>
           <a:srgbClr val="FFFFFF"/>
         </a:solidFill>
+        <a:effectLst/>
       </p:bgPr>
     </p:bg>
     <p:spTree>
@@ -9685,17 +9435,16 @@
             <a:avLst/>
           </a:prstGeom>
           <a:noFill/>
-          <a:ln/>
         </p:spPr>
         <p:txBody>
           <a:bodyPr wrap="square" rtlCol="0" anchor="ctr"/>
           <a:lstStyle/>
           <a:p>
-            <a:pPr indent="0" marL="0">
-              <a:buNone/>
-            </a:pPr>
-            <a:r>
-              <a:rPr lang="en-US" sz="1200" b="1" spc="100" kern="0" dirty="0">
+            <a:pPr marL="0" indent="0">
+              <a:buNone/>
+            </a:pPr>
+            <a:r>
+              <a:rPr lang="en-US" sz="1200" b="1" kern="0" spc="100" dirty="0">
                 <a:solidFill>
                   <a:srgbClr val="3E6E8E"/>
                 </a:solidFill>
@@ -9724,13 +9473,12 @@
             <a:avLst/>
           </a:prstGeom>
           <a:noFill/>
-          <a:ln/>
         </p:spPr>
         <p:txBody>
           <a:bodyPr wrap="square" lIns="0" tIns="0" rIns="0" bIns="0" rtlCol="0" anchor="ctr"/>
           <a:lstStyle/>
           <a:p>
-            <a:pPr indent="0" marL="0">
+            <a:pPr marL="0" indent="0">
               <a:buNone/>
             </a:pPr>
             <a:r>
@@ -9750,7 +9498,7 @@
       </p:sp>
       <p:graphicFrame>
         <p:nvGraphicFramePr>
-          <p:cNvPr id="4" name="Chart 0" descr=""/>
+          <p:cNvPr id="4" name="Chart 0"/>
           <p:cNvGraphicFramePr/>
           <p:nvPr/>
         </p:nvGraphicFramePr>
@@ -9758,9 +9506,9 @@
           <a:off x="548640" y="1554480"/>
           <a:ext cx="5577840" cy="3337560"/>
         </p:xfrm>
-        <a:graphic xmlns:a="http://schemas.openxmlformats.org/drawingml/2006/main">
+        <a:graphic>
           <a:graphicData uri="http://schemas.openxmlformats.org/drawingml/2006/chart">
-            <c:chart xmlns:c="http://schemas.openxmlformats.org/drawingml/2006/chart" r:id="rId1"/>
+            <c:chart xmlns:c="http://schemas.openxmlformats.org/drawingml/2006/chart" xmlns:r="http://schemas.openxmlformats.org/officeDocument/2006/relationships" r:id="rId1"/>
           </a:graphicData>
         </a:graphic>
       </p:graphicFrame>
@@ -9783,7 +9531,6 @@
           <a:solidFill>
             <a:srgbClr val="DCE7EE"/>
           </a:solidFill>
-          <a:ln/>
         </p:spPr>
       </p:sp>
       <p:sp>
@@ -9801,13 +9548,12 @@
             <a:avLst/>
           </a:prstGeom>
           <a:noFill/>
-          <a:ln/>
         </p:spPr>
         <p:txBody>
           <a:bodyPr wrap="square" lIns="0" tIns="0" rIns="0" bIns="0" rtlCol="0" anchor="ctr"/>
           <a:lstStyle/>
           <a:p>
-            <a:pPr algn="l" indent="0" marL="0">
+            <a:pPr marL="0" indent="0" algn="l">
               <a:buNone/>
             </a:pPr>
             <a:r>
@@ -9840,13 +9586,12 @@
             <a:avLst/>
           </a:prstGeom>
           <a:noFill/>
-          <a:ln/>
         </p:spPr>
         <p:txBody>
           <a:bodyPr wrap="square" lIns="0" tIns="0" rIns="0" bIns="0" rtlCol="0" anchor="t"/>
           <a:lstStyle/>
           <a:p>
-            <a:pPr algn="l" indent="0" marL="0">
+            <a:pPr marL="0" indent="0" algn="l">
               <a:buNone/>
             </a:pPr>
             <a:r>
@@ -9883,7 +9628,6 @@
           <a:solidFill>
             <a:srgbClr val="DCE7EE"/>
           </a:solidFill>
-          <a:ln/>
         </p:spPr>
       </p:sp>
       <p:sp>
@@ -9901,13 +9645,12 @@
             <a:avLst/>
           </a:prstGeom>
           <a:noFill/>
-          <a:ln/>
         </p:spPr>
         <p:txBody>
           <a:bodyPr wrap="square" lIns="0" tIns="0" rIns="0" bIns="0" rtlCol="0" anchor="ctr"/>
           <a:lstStyle/>
           <a:p>
-            <a:pPr algn="l" indent="0" marL="0">
+            <a:pPr marL="0" indent="0" algn="l">
               <a:buNone/>
             </a:pPr>
             <a:r>
@@ -9940,13 +9683,12 @@
             <a:avLst/>
           </a:prstGeom>
           <a:noFill/>
-          <a:ln/>
         </p:spPr>
         <p:txBody>
           <a:bodyPr wrap="square" lIns="0" tIns="0" rIns="0" bIns="0" rtlCol="0" anchor="t"/>
           <a:lstStyle/>
           <a:p>
-            <a:pPr algn="l" indent="0" marL="0">
+            <a:pPr marL="0" indent="0" algn="l">
               <a:buNone/>
             </a:pPr>
             <a:r>
@@ -9983,7 +9725,6 @@
           <a:solidFill>
             <a:srgbClr val="F3E4D8"/>
           </a:solidFill>
-          <a:ln/>
         </p:spPr>
       </p:sp>
       <p:sp>
@@ -10001,13 +9742,12 @@
             <a:avLst/>
           </a:prstGeom>
           <a:noFill/>
-          <a:ln/>
         </p:spPr>
         <p:txBody>
           <a:bodyPr wrap="square" lIns="0" tIns="0" rIns="0" bIns="0" rtlCol="0" anchor="ctr"/>
           <a:lstStyle/>
           <a:p>
-            <a:pPr indent="0" marL="0">
+            <a:pPr marL="0" indent="0">
               <a:buNone/>
             </a:pPr>
             <a:r>
@@ -10040,13 +9780,12 @@
             <a:avLst/>
           </a:prstGeom>
           <a:noFill/>
-          <a:ln/>
         </p:spPr>
         <p:txBody>
           <a:bodyPr wrap="square" lIns="0" tIns="0" rIns="0" bIns="0" rtlCol="0" anchor="ctr"/>
           <a:lstStyle/>
           <a:p>
-            <a:pPr indent="0" marL="0">
+            <a:pPr marL="0" indent="0">
               <a:buNone/>
             </a:pPr>
             <a:r>
@@ -10079,7 +9818,6 @@
             <a:avLst/>
           </a:prstGeom>
           <a:noFill/>
-          <a:ln/>
         </p:spPr>
         <p:txBody>
           <a:bodyPr wrap="square" rtlCol="0" anchor="t"/>
@@ -10143,13 +9881,12 @@
             <a:avLst/>
           </a:prstGeom>
           <a:noFill/>
-          <a:ln/>
         </p:spPr>
         <p:txBody>
           <a:bodyPr wrap="square" rtlCol="0" anchor="ctr"/>
           <a:lstStyle/>
           <a:p>
-            <a:pPr algn="r" indent="0" marL="0">
+            <a:pPr marL="0" indent="0" algn="r">
               <a:buNone/>
             </a:pPr>
             <a:r>
@@ -10177,12 +9914,13 @@
 
 <file path=ppt/slides/slide7.xml><?xml version="1.0" encoding="utf-8"?>
 <p:sld xmlns:a="http://schemas.openxmlformats.org/drawingml/2006/main" xmlns:r="http://schemas.openxmlformats.org/officeDocument/2006/relationships" xmlns:p="http://schemas.openxmlformats.org/presentationml/2006/main">
-  <p:cSld name="Slide 7">
+  <p:cSld>
     <p:bg>
       <p:bgPr>
         <a:solidFill>
           <a:srgbClr val="FFFFFF"/>
         </a:solidFill>
+        <a:effectLst/>
       </p:bgPr>
     </p:bg>
     <p:spTree>
@@ -10214,17 +9952,16 @@
             <a:avLst/>
           </a:prstGeom>
           <a:noFill/>
-          <a:ln/>
         </p:spPr>
         <p:txBody>
           <a:bodyPr wrap="square" rtlCol="0" anchor="ctr"/>
           <a:lstStyle/>
           <a:p>
-            <a:pPr indent="0" marL="0">
-              <a:buNone/>
-            </a:pPr>
-            <a:r>
-              <a:rPr lang="en-US" sz="1200" b="1" spc="100" kern="0" dirty="0">
+            <a:pPr marL="0" indent="0">
+              <a:buNone/>
+            </a:pPr>
+            <a:r>
+              <a:rPr lang="en-US" sz="1200" b="1" kern="0" spc="100" dirty="0">
                 <a:solidFill>
                   <a:srgbClr val="3E6E8E"/>
                 </a:solidFill>
@@ -10253,13 +9990,12 @@
             <a:avLst/>
           </a:prstGeom>
           <a:noFill/>
-          <a:ln/>
         </p:spPr>
         <p:txBody>
           <a:bodyPr wrap="square" lIns="0" tIns="0" rIns="0" bIns="0" rtlCol="0" anchor="ctr"/>
           <a:lstStyle/>
           <a:p>
-            <a:pPr indent="0" marL="0">
+            <a:pPr marL="0" indent="0">
               <a:buNone/>
             </a:pPr>
             <a:r>
@@ -10296,7 +10032,6 @@
           <a:solidFill>
             <a:srgbClr val="DCE7EE"/>
           </a:solidFill>
-          <a:ln/>
         </p:spPr>
       </p:sp>
       <p:sp>
@@ -10314,13 +10049,12 @@
             <a:avLst/>
           </a:prstGeom>
           <a:noFill/>
-          <a:ln/>
         </p:spPr>
         <p:txBody>
           <a:bodyPr wrap="square" lIns="0" tIns="0" rIns="0" bIns="0" rtlCol="0" anchor="ctr"/>
           <a:lstStyle/>
           <a:p>
-            <a:pPr algn="l" indent="0" marL="0">
+            <a:pPr marL="0" indent="0" algn="l">
               <a:buNone/>
             </a:pPr>
             <a:r>
@@ -10353,13 +10087,12 @@
             <a:avLst/>
           </a:prstGeom>
           <a:noFill/>
-          <a:ln/>
         </p:spPr>
         <p:txBody>
           <a:bodyPr wrap="square" lIns="0" tIns="0" rIns="0" bIns="0" rtlCol="0" anchor="t"/>
           <a:lstStyle/>
           <a:p>
-            <a:pPr algn="l" indent="0" marL="0">
+            <a:pPr marL="0" indent="0" algn="l">
               <a:buNone/>
             </a:pPr>
             <a:r>
@@ -10396,7 +10129,6 @@
           <a:solidFill>
             <a:srgbClr val="E4EEE7"/>
           </a:solidFill>
-          <a:ln/>
         </p:spPr>
       </p:sp>
       <p:sp>
@@ -10414,13 +10146,12 @@
             <a:avLst/>
           </a:prstGeom>
           <a:noFill/>
-          <a:ln/>
         </p:spPr>
         <p:txBody>
           <a:bodyPr wrap="square" lIns="0" tIns="0" rIns="0" bIns="0" rtlCol="0" anchor="ctr"/>
           <a:lstStyle/>
           <a:p>
-            <a:pPr algn="l" indent="0" marL="0">
+            <a:pPr marL="0" indent="0" algn="l">
               <a:buNone/>
             </a:pPr>
             <a:r>
@@ -10453,13 +10184,12 @@
             <a:avLst/>
           </a:prstGeom>
           <a:noFill/>
-          <a:ln/>
         </p:spPr>
         <p:txBody>
           <a:bodyPr wrap="square" lIns="0" tIns="0" rIns="0" bIns="0" rtlCol="0" anchor="t"/>
           <a:lstStyle/>
           <a:p>
-            <a:pPr algn="l" indent="0" marL="0">
+            <a:pPr marL="0" indent="0" algn="l">
               <a:buNone/>
             </a:pPr>
             <a:r>
@@ -10479,7 +10209,7 @@
       </p:sp>
       <p:graphicFrame>
         <p:nvGraphicFramePr>
-          <p:cNvPr id="10" name="Chart 0" descr=""/>
+          <p:cNvPr id="10" name="Chart 0"/>
           <p:cNvGraphicFramePr/>
           <p:nvPr/>
         </p:nvGraphicFramePr>
@@ -10487,9 +10217,9 @@
           <a:off x="7040880" y="1691640"/>
           <a:ext cx="4572000" cy="3566160"/>
         </p:xfrm>
-        <a:graphic xmlns:a="http://schemas.openxmlformats.org/drawingml/2006/main">
+        <a:graphic>
           <a:graphicData uri="http://schemas.openxmlformats.org/drawingml/2006/chart">
-            <c:chart xmlns:c="http://schemas.openxmlformats.org/drawingml/2006/chart" r:id="rId1"/>
+            <c:chart xmlns:c="http://schemas.openxmlformats.org/drawingml/2006/chart" xmlns:r="http://schemas.openxmlformats.org/officeDocument/2006/relationships" r:id="rId1"/>
           </a:graphicData>
         </a:graphic>
       </p:graphicFrame>
@@ -10508,7 +10238,6 @@
             <a:avLst/>
           </a:prstGeom>
           <a:noFill/>
-          <a:ln/>
         </p:spPr>
         <p:txBody>
           <a:bodyPr wrap="square" rtlCol="0" anchor="t"/>
@@ -10593,13 +10322,12 @@
             <a:avLst/>
           </a:prstGeom>
           <a:noFill/>
-          <a:ln/>
         </p:spPr>
         <p:txBody>
           <a:bodyPr wrap="square" rtlCol="0" anchor="ctr"/>
           <a:lstStyle/>
           <a:p>
-            <a:pPr algn="r" indent="0" marL="0">
+            <a:pPr marL="0" indent="0" algn="r">
               <a:buNone/>
             </a:pPr>
             <a:r>
@@ -10627,12 +10355,13 @@
 
 <file path=ppt/slides/slide8.xml><?xml version="1.0" encoding="utf-8"?>
 <p:sld xmlns:a="http://schemas.openxmlformats.org/drawingml/2006/main" xmlns:r="http://schemas.openxmlformats.org/officeDocument/2006/relationships" xmlns:p="http://schemas.openxmlformats.org/presentationml/2006/main">
-  <p:cSld name="Slide 8">
+  <p:cSld>
     <p:bg>
       <p:bgPr>
         <a:solidFill>
           <a:srgbClr val="16253D"/>
         </a:solidFill>
+        <a:effectLst/>
       </p:bgPr>
     </p:bg>
     <p:spTree>
@@ -10664,17 +10393,16 @@
             <a:avLst/>
           </a:prstGeom>
           <a:noFill/>
-          <a:ln/>
         </p:spPr>
         <p:txBody>
           <a:bodyPr wrap="square" rtlCol="0" anchor="ctr"/>
           <a:lstStyle/>
           <a:p>
-            <a:pPr indent="0" marL="0">
-              <a:buNone/>
-            </a:pPr>
-            <a:r>
-              <a:rPr lang="en-US" sz="1200" b="1" spc="100" kern="0" dirty="0">
+            <a:pPr marL="0" indent="0">
+              <a:buNone/>
+            </a:pPr>
+            <a:r>
+              <a:rPr lang="en-US" sz="1200" b="1" kern="0" spc="100" dirty="0">
                 <a:solidFill>
                   <a:srgbClr val="E0A458"/>
                 </a:solidFill>
@@ -10703,13 +10431,12 @@
             <a:avLst/>
           </a:prstGeom>
           <a:noFill/>
-          <a:ln/>
         </p:spPr>
         <p:txBody>
           <a:bodyPr wrap="square" lIns="0" tIns="0" rIns="0" bIns="0" rtlCol="0" anchor="ctr"/>
           <a:lstStyle/>
           <a:p>
-            <a:pPr indent="0" marL="0">
+            <a:pPr marL="0" indent="0">
               <a:buNone/>
             </a:pPr>
             <a:r>
@@ -10746,7 +10473,6 @@
           <a:solidFill>
             <a:srgbClr val="1F3A5C"/>
           </a:solidFill>
-          <a:ln/>
         </p:spPr>
       </p:sp>
       <p:sp>
@@ -10764,17 +10490,16 @@
             <a:avLst/>
           </a:prstGeom>
           <a:noFill/>
-          <a:ln/>
         </p:spPr>
         <p:txBody>
           <a:bodyPr wrap="square" rtlCol="0" anchor="ctr"/>
           <a:lstStyle/>
           <a:p>
-            <a:pPr indent="0" marL="0">
-              <a:buNone/>
-            </a:pPr>
-            <a:r>
-              <a:rPr lang="en-US" sz="1100" b="1" spc="100" kern="0" dirty="0">
+            <a:pPr marL="0" indent="0">
+              <a:buNone/>
+            </a:pPr>
+            <a:r>
+              <a:rPr lang="en-US" sz="1100" b="1" kern="0" spc="100" dirty="0">
                 <a:solidFill>
                   <a:srgbClr val="E0A458"/>
                 </a:solidFill>
@@ -10803,13 +10528,12 @@
             <a:avLst/>
           </a:prstGeom>
           <a:noFill/>
-          <a:ln/>
         </p:spPr>
         <p:txBody>
           <a:bodyPr wrap="square" lIns="0" tIns="0" rIns="0" bIns="0" rtlCol="0" anchor="ctr"/>
           <a:lstStyle/>
           <a:p>
-            <a:pPr indent="0" marL="0">
+            <a:pPr marL="0" indent="0">
               <a:buNone/>
             </a:pPr>
             <a:r>
@@ -10842,13 +10566,12 @@
             <a:avLst/>
           </a:prstGeom>
           <a:noFill/>
-          <a:ln/>
         </p:spPr>
         <p:txBody>
           <a:bodyPr wrap="square" lIns="0" tIns="0" rIns="0" bIns="0" rtlCol="0" anchor="ctr"/>
           <a:lstStyle/>
           <a:p>
-            <a:pPr indent="0" marL="0">
+            <a:pPr marL="0" indent="0">
               <a:buNone/>
             </a:pPr>
             <a:r>
@@ -10881,13 +10604,12 @@
             <a:avLst/>
           </a:prstGeom>
           <a:noFill/>
-          <a:ln/>
         </p:spPr>
         <p:txBody>
           <a:bodyPr wrap="square" rtlCol="0" anchor="ctr"/>
           <a:lstStyle/>
           <a:p>
-            <a:pPr indent="0" marL="0">
+            <a:pPr marL="0" indent="0">
               <a:buNone/>
             </a:pPr>
             <a:r>
@@ -10924,7 +10646,6 @@
           <a:solidFill>
             <a:srgbClr val="1F3A5C"/>
           </a:solidFill>
-          <a:ln/>
         </p:spPr>
       </p:sp>
       <p:sp>
@@ -10942,17 +10663,16 @@
             <a:avLst/>
           </a:prstGeom>
           <a:noFill/>
-          <a:ln/>
         </p:spPr>
         <p:txBody>
           <a:bodyPr wrap="square" rtlCol="0" anchor="ctr"/>
           <a:lstStyle/>
           <a:p>
-            <a:pPr indent="0" marL="0">
-              <a:buNone/>
-            </a:pPr>
-            <a:r>
-              <a:rPr lang="en-US" sz="1100" b="1" spc="100" kern="0" dirty="0">
+            <a:pPr marL="0" indent="0">
+              <a:buNone/>
+            </a:pPr>
+            <a:r>
+              <a:rPr lang="en-US" sz="1100" b="1" kern="0" spc="100" dirty="0">
                 <a:solidFill>
                   <a:srgbClr val="E0A458"/>
                 </a:solidFill>
@@ -10981,13 +10701,12 @@
             <a:avLst/>
           </a:prstGeom>
           <a:noFill/>
-          <a:ln/>
         </p:spPr>
         <p:txBody>
           <a:bodyPr wrap="square" lIns="0" tIns="0" rIns="0" bIns="0" rtlCol="0" anchor="ctr"/>
           <a:lstStyle/>
           <a:p>
-            <a:pPr indent="0" marL="0">
+            <a:pPr marL="0" indent="0">
               <a:buNone/>
             </a:pPr>
             <a:r>
@@ -11020,13 +10739,12 @@
             <a:avLst/>
           </a:prstGeom>
           <a:noFill/>
-          <a:ln/>
         </p:spPr>
         <p:txBody>
           <a:bodyPr wrap="square" lIns="0" tIns="0" rIns="0" bIns="0" rtlCol="0" anchor="ctr"/>
           <a:lstStyle/>
           <a:p>
-            <a:pPr indent="0" marL="0">
+            <a:pPr marL="0" indent="0">
               <a:buNone/>
             </a:pPr>
             <a:r>
@@ -11059,13 +10777,12 @@
             <a:avLst/>
           </a:prstGeom>
           <a:noFill/>
-          <a:ln/>
         </p:spPr>
         <p:txBody>
           <a:bodyPr wrap="square" rtlCol="0" anchor="ctr"/>
           <a:lstStyle/>
           <a:p>
-            <a:pPr indent="0" marL="0">
+            <a:pPr marL="0" indent="0">
               <a:buNone/>
             </a:pPr>
             <a:r>
@@ -11098,13 +10815,12 @@
             <a:avLst/>
           </a:prstGeom>
           <a:noFill/>
-          <a:ln/>
         </p:spPr>
         <p:txBody>
           <a:bodyPr wrap="square" rtlCol="0" anchor="ctr"/>
           <a:lstStyle/>
           <a:p>
-            <a:pPr indent="0" marL="0">
+            <a:pPr marL="0" indent="0">
               <a:buNone/>
             </a:pPr>
             <a:r>
@@ -11137,13 +10853,12 @@
             <a:avLst/>
           </a:prstGeom>
           <a:noFill/>
-          <a:ln/>
         </p:spPr>
         <p:txBody>
           <a:bodyPr wrap="square" rtlCol="0" anchor="ctr"/>
           <a:lstStyle/>
           <a:p>
-            <a:pPr algn="r" indent="0" marL="0">
+            <a:pPr marL="0" indent="0" algn="r">
               <a:buNone/>
             </a:pPr>
             <a:r>
@@ -11171,12 +10886,13 @@
 
 <file path=ppt/slides/slide9.xml><?xml version="1.0" encoding="utf-8"?>
 <p:sld xmlns:a="http://schemas.openxmlformats.org/drawingml/2006/main" xmlns:r="http://schemas.openxmlformats.org/officeDocument/2006/relationships" xmlns:p="http://schemas.openxmlformats.org/presentationml/2006/main">
-  <p:cSld name="Slide 9">
+  <p:cSld>
     <p:bg>
       <p:bgPr>
         <a:solidFill>
           <a:srgbClr val="FFFFFF"/>
         </a:solidFill>
+        <a:effectLst/>
       </p:bgPr>
     </p:bg>
     <p:spTree>
@@ -11208,17 +10924,16 @@
             <a:avLst/>
           </a:prstGeom>
           <a:noFill/>
-          <a:ln/>
         </p:spPr>
         <p:txBody>
           <a:bodyPr wrap="square" rtlCol="0" anchor="ctr"/>
           <a:lstStyle/>
           <a:p>
-            <a:pPr indent="0" marL="0">
-              <a:buNone/>
-            </a:pPr>
-            <a:r>
-              <a:rPr lang="en-US" sz="1200" b="1" spc="100" kern="0" dirty="0">
+            <a:pPr marL="0" indent="0">
+              <a:buNone/>
+            </a:pPr>
+            <a:r>
+              <a:rPr lang="en-US" sz="1200" b="1" kern="0" spc="100" dirty="0">
                 <a:solidFill>
                   <a:srgbClr val="3E6E8E"/>
                 </a:solidFill>
@@ -11247,13 +10962,12 @@
             <a:avLst/>
           </a:prstGeom>
           <a:noFill/>
-          <a:ln/>
         </p:spPr>
         <p:txBody>
           <a:bodyPr wrap="square" lIns="0" tIns="0" rIns="0" bIns="0" rtlCol="0" anchor="ctr"/>
           <a:lstStyle/>
           <a:p>
-            <a:pPr indent="0" marL="0">
+            <a:pPr marL="0" indent="0">
               <a:buNone/>
             </a:pPr>
             <a:r>
@@ -11290,7 +11004,6 @@
           <a:solidFill>
             <a:srgbClr val="F1F4F7"/>
           </a:solidFill>
-          <a:ln/>
         </p:spPr>
       </p:sp>
       <p:sp>
@@ -11312,7 +11025,6 @@
           <a:solidFill>
             <a:srgbClr val="3E6E8E"/>
           </a:solidFill>
-          <a:ln/>
         </p:spPr>
       </p:sp>
       <p:sp>
@@ -11330,13 +11042,12 @@
             <a:avLst/>
           </a:prstGeom>
           <a:noFill/>
-          <a:ln/>
         </p:spPr>
         <p:txBody>
           <a:bodyPr wrap="square" lIns="0" tIns="0" rIns="0" bIns="0" rtlCol="0" anchor="ctr"/>
           <a:lstStyle/>
           <a:p>
-            <a:pPr algn="ctr" indent="0" marL="0">
+            <a:pPr marL="0" indent="0" algn="ctr">
               <a:buNone/>
             </a:pPr>
             <a:r>
@@ -11369,13 +11080,12 @@
             <a:avLst/>
           </a:prstGeom>
           <a:noFill/>
-          <a:ln/>
         </p:spPr>
         <p:txBody>
           <a:bodyPr wrap="square" lIns="0" tIns="0" rIns="0" bIns="0" rtlCol="0" anchor="ctr"/>
           <a:lstStyle/>
           <a:p>
-            <a:pPr indent="0" marL="0">
+            <a:pPr marL="0" indent="0">
               <a:buNone/>
             </a:pPr>
             <a:r>
@@ -11408,13 +11118,12 @@
             <a:avLst/>
           </a:prstGeom>
           <a:noFill/>
-          <a:ln/>
         </p:spPr>
         <p:txBody>
           <a:bodyPr wrap="square" lIns="0" tIns="0" rIns="0" bIns="0" rtlCol="0" anchor="t"/>
           <a:lstStyle/>
           <a:p>
-            <a:pPr indent="0" marL="0">
+            <a:pPr marL="0" indent="0">
               <a:buNone/>
             </a:pPr>
             <a:r>
@@ -11451,7 +11160,6 @@
           <a:solidFill>
             <a:srgbClr val="F1F4F7"/>
           </a:solidFill>
-          <a:ln/>
         </p:spPr>
       </p:sp>
       <p:sp>
@@ -11473,7 +11181,6 @@
           <a:solidFill>
             <a:srgbClr val="3E6E8E"/>
           </a:solidFill>
-          <a:ln/>
         </p:spPr>
       </p:sp>
       <p:sp>
@@ -11491,13 +11198,12 @@
             <a:avLst/>
           </a:prstGeom>
           <a:noFill/>
-          <a:ln/>
         </p:spPr>
         <p:txBody>
           <a:bodyPr wrap="square" lIns="0" tIns="0" rIns="0" bIns="0" rtlCol="0" anchor="ctr"/>
           <a:lstStyle/>
           <a:p>
-            <a:pPr algn="ctr" indent="0" marL="0">
+            <a:pPr marL="0" indent="0" algn="ctr">
               <a:buNone/>
             </a:pPr>
             <a:r>
@@ -11530,13 +11236,12 @@
             <a:avLst/>
           </a:prstGeom>
           <a:noFill/>
-          <a:ln/>
         </p:spPr>
         <p:txBody>
           <a:bodyPr wrap="square" lIns="0" tIns="0" rIns="0" bIns="0" rtlCol="0" anchor="ctr"/>
           <a:lstStyle/>
           <a:p>
-            <a:pPr indent="0" marL="0">
+            <a:pPr marL="0" indent="0">
               <a:buNone/>
             </a:pPr>
             <a:r>
@@ -11569,13 +11274,12 @@
             <a:avLst/>
           </a:prstGeom>
           <a:noFill/>
-          <a:ln/>
         </p:spPr>
         <p:txBody>
           <a:bodyPr wrap="square" lIns="0" tIns="0" rIns="0" bIns="0" rtlCol="0" anchor="t"/>
           <a:lstStyle/>
           <a:p>
-            <a:pPr indent="0" marL="0">
+            <a:pPr marL="0" indent="0">
               <a:buNone/>
             </a:pPr>
             <a:r>
@@ -11612,7 +11316,6 @@
           <a:solidFill>
             <a:srgbClr val="F1F4F7"/>
           </a:solidFill>
-          <a:ln/>
         </p:spPr>
       </p:sp>
       <p:sp>
@@ -11634,7 +11337,6 @@
           <a:solidFill>
             <a:srgbClr val="3E6E8E"/>
           </a:solidFill>
-          <a:ln/>
         </p:spPr>
       </p:sp>
       <p:sp>
@@ -11652,13 +11354,12 @@
             <a:avLst/>
           </a:prstGeom>
           <a:noFill/>
-          <a:ln/>
         </p:spPr>
         <p:txBody>
           <a:bodyPr wrap="square" lIns="0" tIns="0" rIns="0" bIns="0" rtlCol="0" anchor="ctr"/>
           <a:lstStyle/>
           <a:p>
-            <a:pPr algn="ctr" indent="0" marL="0">
+            <a:pPr marL="0" indent="0" algn="ctr">
               <a:buNone/>
             </a:pPr>
             <a:r>
@@ -11691,13 +11392,12 @@
             <a:avLst/>
           </a:prstGeom>
           <a:noFill/>
-          <a:ln/>
         </p:spPr>
         <p:txBody>
           <a:bodyPr wrap="square" lIns="0" tIns="0" rIns="0" bIns="0" rtlCol="0" anchor="ctr"/>
           <a:lstStyle/>
           <a:p>
-            <a:pPr indent="0" marL="0">
+            <a:pPr marL="0" indent="0">
               <a:buNone/>
             </a:pPr>
             <a:r>
@@ -11730,13 +11430,12 @@
             <a:avLst/>
           </a:prstGeom>
           <a:noFill/>
-          <a:ln/>
         </p:spPr>
         <p:txBody>
           <a:bodyPr wrap="square" lIns="0" tIns="0" rIns="0" bIns="0" rtlCol="0" anchor="t"/>
           <a:lstStyle/>
           <a:p>
-            <a:pPr indent="0" marL="0">
+            <a:pPr marL="0" indent="0">
               <a:buNone/>
             </a:pPr>
             <a:r>
@@ -11769,13 +11468,12 @@
             <a:avLst/>
           </a:prstGeom>
           <a:noFill/>
-          <a:ln/>
         </p:spPr>
         <p:txBody>
           <a:bodyPr wrap="square" rtlCol="0" anchor="ctr"/>
           <a:lstStyle/>
           <a:p>
-            <a:pPr algn="r" indent="0" marL="0">
+            <a:pPr marL="0" indent="0" algn="r">
               <a:buNone/>
             </a:pPr>
             <a:r>
@@ -11844,7 +11542,7 @@
     </a:clrScheme>
     <a:fontScheme name="Office">
       <a:majorFont>
-        <a:latin typeface="Calibri Light" panose="020F0302020204030204"/>
+        <a:latin typeface="Calibri Light"/>
         <a:ea typeface=""/>
         <a:cs typeface=""/>
         <a:font script="Jpan" typeface="游ゴシック Light"/>
@@ -11877,26 +11575,9 @@
         <a:font script="Viet" typeface="Times New Roman"/>
         <a:font script="Uigh" typeface="Microsoft Uighur"/>
         <a:font script="Geor" typeface="Sylfaen"/>
-        <a:font script="Armn" typeface="Arial"/>
-        <a:font script="Bugi" typeface="Leelawadee UI"/>
-        <a:font script="Bopo" typeface="Microsoft JhengHei"/>
-        <a:font script="Java" typeface="Javanese Text"/>
-        <a:font script="Lisu" typeface="Segoe UI"/>
-        <a:font script="Mymr" typeface="Myanmar Text"/>
-        <a:font script="Nkoo" typeface="Ebrima"/>
-        <a:font script="Olck" typeface="Nirmala UI"/>
-        <a:font script="Osma" typeface="Ebrima"/>
-        <a:font script="Phag" typeface="Phagspa"/>
-        <a:font script="Syrn" typeface="Estrangelo Edessa"/>
-        <a:font script="Syrj" typeface="Estrangelo Edessa"/>
-        <a:font script="Syre" typeface="Estrangelo Edessa"/>
-        <a:font script="Sora" typeface="Nirmala UI"/>
-        <a:font script="Tale" typeface="Microsoft Tai Le"/>
-        <a:font script="Talu" typeface="Microsoft New Tai Lue"/>
-        <a:font script="Tfng" typeface="Ebrima"/>
       </a:majorFont>
       <a:minorFont>
-        <a:latin typeface="Calibri" panose="020F0502020204030204"/>
+        <a:latin typeface="Calibri"/>
         <a:ea typeface=""/>
         <a:cs typeface=""/>
         <a:font script="Jpan" typeface="游ゴシック"/>
@@ -11929,23 +11610,6 @@
         <a:font script="Viet" typeface="Arial"/>
         <a:font script="Uigh" typeface="Microsoft Uighur"/>
         <a:font script="Geor" typeface="Sylfaen"/>
-        <a:font script="Armn" typeface="Arial"/>
-        <a:font script="Bugi" typeface="Leelawadee UI"/>
-        <a:font script="Bopo" typeface="Microsoft JhengHei"/>
-        <a:font script="Java" typeface="Javanese Text"/>
-        <a:font script="Lisu" typeface="Segoe UI"/>
-        <a:font script="Mymr" typeface="Myanmar Text"/>
-        <a:font script="Nkoo" typeface="Ebrima"/>
-        <a:font script="Olck" typeface="Nirmala UI"/>
-        <a:font script="Osma" typeface="Ebrima"/>
-        <a:font script="Phag" typeface="Phagspa"/>
-        <a:font script="Syrn" typeface="Estrangelo Edessa"/>
-        <a:font script="Syrj" typeface="Estrangelo Edessa"/>
-        <a:font script="Syre" typeface="Estrangelo Edessa"/>
-        <a:font script="Sora" typeface="Nirmala UI"/>
-        <a:font script="Tale" typeface="Microsoft Tai Le"/>
-        <a:font script="Talu" typeface="Microsoft New Tai Lue"/>
-        <a:font script="Tfng" typeface="Ebrima"/>
       </a:minorFont>
     </a:fontScheme>
     <a:fmtScheme name="Office">
@@ -12086,8 +11750,265 @@
       </a:bgFillStyleLst>
     </a:fmtScheme>
   </a:themeElements>
-  <a:objectDefaults/>
-  <a:extraClrSchemeLst/>
+  <a:extLst>
+    <a:ext uri="{05A4C25C-085E-4340-85A3-A5531E510DB2}">
+      <thm15:themeFamily xmlns:thm15="http://schemas.microsoft.com/office/thememl/2012/main" name="Office Theme" id="{62F939B6-93AF-4DB8-9C6B-D6C7DFDC589F}" vid="{4A3C46E8-61CC-4603-A589-7422A47A8E4A}"/>
+    </a:ext>
+  </a:extLst>
+</a:theme>
+</file>
+
+<file path=ppt/theme/theme2.xml><?xml version="1.0" encoding="utf-8"?>
+<a:theme xmlns:a="http://schemas.openxmlformats.org/drawingml/2006/main" name="Office Theme">
+  <a:themeElements>
+    <a:clrScheme name="Office">
+      <a:dk1>
+        <a:sysClr val="windowText" lastClr="000000"/>
+      </a:dk1>
+      <a:lt1>
+        <a:sysClr val="window" lastClr="FFFFFF"/>
+      </a:lt1>
+      <a:dk2>
+        <a:srgbClr val="44546A"/>
+      </a:dk2>
+      <a:lt2>
+        <a:srgbClr val="E7E6E6"/>
+      </a:lt2>
+      <a:accent1>
+        <a:srgbClr val="4472C4"/>
+      </a:accent1>
+      <a:accent2>
+        <a:srgbClr val="ED7D31"/>
+      </a:accent2>
+      <a:accent3>
+        <a:srgbClr val="A5A5A5"/>
+      </a:accent3>
+      <a:accent4>
+        <a:srgbClr val="FFC000"/>
+      </a:accent4>
+      <a:accent5>
+        <a:srgbClr val="5B9BD5"/>
+      </a:accent5>
+      <a:accent6>
+        <a:srgbClr val="70AD47"/>
+      </a:accent6>
+      <a:hlink>
+        <a:srgbClr val="0563C1"/>
+      </a:hlink>
+      <a:folHlink>
+        <a:srgbClr val="954F72"/>
+      </a:folHlink>
+    </a:clrScheme>
+    <a:fontScheme name="Office">
+      <a:majorFont>
+        <a:latin typeface="Calibri Light"/>
+        <a:ea typeface=""/>
+        <a:cs typeface=""/>
+        <a:font script="Jpan" typeface="游ゴシック Light"/>
+        <a:font script="Hang" typeface="맑은 고딕"/>
+        <a:font script="Hans" typeface="等线 Light"/>
+        <a:font script="Hant" typeface="新細明體"/>
+        <a:font script="Arab" typeface="Times New Roman"/>
+        <a:font script="Hebr" typeface="Times New Roman"/>
+        <a:font script="Thai" typeface="Angsana New"/>
+        <a:font script="Ethi" typeface="Nyala"/>
+        <a:font script="Beng" typeface="Vrinda"/>
+        <a:font script="Gujr" typeface="Shruti"/>
+        <a:font script="Khmr" typeface="MoolBoran"/>
+        <a:font script="Knda" typeface="Tunga"/>
+        <a:font script="Guru" typeface="Raavi"/>
+        <a:font script="Cans" typeface="Euphemia"/>
+        <a:font script="Cher" typeface="Plantagenet Cherokee"/>
+        <a:font script="Yiii" typeface="Microsoft Yi Baiti"/>
+        <a:font script="Tibt" typeface="Microsoft Himalaya"/>
+        <a:font script="Thaa" typeface="MV Boli"/>
+        <a:font script="Deva" typeface="Mangal"/>
+        <a:font script="Telu" typeface="Gautami"/>
+        <a:font script="Taml" typeface="Latha"/>
+        <a:font script="Syrc" typeface="Estrangelo Edessa"/>
+        <a:font script="Orya" typeface="Kalinga"/>
+        <a:font script="Mlym" typeface="Kartika"/>
+        <a:font script="Laoo" typeface="DokChampa"/>
+        <a:font script="Sinh" typeface="Iskoola Pota"/>
+        <a:font script="Mong" typeface="Mongolian Baiti"/>
+        <a:font script="Viet" typeface="Times New Roman"/>
+        <a:font script="Uigh" typeface="Microsoft Uighur"/>
+        <a:font script="Geor" typeface="Sylfaen"/>
+      </a:majorFont>
+      <a:minorFont>
+        <a:latin typeface="Calibri"/>
+        <a:ea typeface=""/>
+        <a:cs typeface=""/>
+        <a:font script="Jpan" typeface="游ゴシック"/>
+        <a:font script="Hang" typeface="맑은 고딕"/>
+        <a:font script="Hans" typeface="等线"/>
+        <a:font script="Hant" typeface="新細明體"/>
+        <a:font script="Arab" typeface="Arial"/>
+        <a:font script="Hebr" typeface="Arial"/>
+        <a:font script="Thai" typeface="Cordia New"/>
+        <a:font script="Ethi" typeface="Nyala"/>
+        <a:font script="Beng" typeface="Vrinda"/>
+        <a:font script="Gujr" typeface="Shruti"/>
+        <a:font script="Khmr" typeface="DaunPenh"/>
+        <a:font script="Knda" typeface="Tunga"/>
+        <a:font script="Guru" typeface="Raavi"/>
+        <a:font script="Cans" typeface="Euphemia"/>
+        <a:font script="Cher" typeface="Plantagenet Cherokee"/>
+        <a:font script="Yiii" typeface="Microsoft Yi Baiti"/>
+        <a:font script="Tibt" typeface="Microsoft Himalaya"/>
+        <a:font script="Thaa" typeface="MV Boli"/>
+        <a:font script="Deva" typeface="Mangal"/>
+        <a:font script="Telu" typeface="Gautami"/>
+        <a:font script="Taml" typeface="Latha"/>
+        <a:font script="Syrc" typeface="Estrangelo Edessa"/>
+        <a:font script="Orya" typeface="Kalinga"/>
+        <a:font script="Mlym" typeface="Kartika"/>
+        <a:font script="Laoo" typeface="DokChampa"/>
+        <a:font script="Sinh" typeface="Iskoola Pota"/>
+        <a:font script="Mong" typeface="Mongolian Baiti"/>
+        <a:font script="Viet" typeface="Arial"/>
+        <a:font script="Uigh" typeface="Microsoft Uighur"/>
+        <a:font script="Geor" typeface="Sylfaen"/>
+      </a:minorFont>
+    </a:fontScheme>
+    <a:fmtScheme name="Office">
+      <a:fillStyleLst>
+        <a:solidFill>
+          <a:schemeClr val="phClr"/>
+        </a:solidFill>
+        <a:gradFill rotWithShape="1">
+          <a:gsLst>
+            <a:gs pos="0">
+              <a:schemeClr val="phClr">
+                <a:lumMod val="110000"/>
+                <a:satMod val="105000"/>
+                <a:tint val="67000"/>
+              </a:schemeClr>
+            </a:gs>
+            <a:gs pos="50000">
+              <a:schemeClr val="phClr">
+                <a:lumMod val="105000"/>
+                <a:satMod val="103000"/>
+                <a:tint val="73000"/>
+              </a:schemeClr>
+            </a:gs>
+            <a:gs pos="100000">
+              <a:schemeClr val="phClr">
+                <a:lumMod val="105000"/>
+                <a:satMod val="109000"/>
+                <a:tint val="81000"/>
+              </a:schemeClr>
+            </a:gs>
+          </a:gsLst>
+          <a:lin ang="5400000" scaled="0"/>
+        </a:gradFill>
+        <a:gradFill rotWithShape="1">
+          <a:gsLst>
+            <a:gs pos="0">
+              <a:schemeClr val="phClr">
+                <a:satMod val="103000"/>
+                <a:lumMod val="102000"/>
+                <a:tint val="94000"/>
+              </a:schemeClr>
+            </a:gs>
+            <a:gs pos="50000">
+              <a:schemeClr val="phClr">
+                <a:satMod val="110000"/>
+                <a:lumMod val="100000"/>
+                <a:shade val="100000"/>
+              </a:schemeClr>
+            </a:gs>
+            <a:gs pos="100000">
+              <a:schemeClr val="phClr">
+                <a:lumMod val="99000"/>
+                <a:satMod val="120000"/>
+                <a:shade val="78000"/>
+              </a:schemeClr>
+            </a:gs>
+          </a:gsLst>
+          <a:lin ang="5400000" scaled="0"/>
+        </a:gradFill>
+      </a:fillStyleLst>
+      <a:lnStyleLst>
+        <a:ln w="6350" cap="flat" cmpd="sng" algn="ctr">
+          <a:solidFill>
+            <a:schemeClr val="phClr"/>
+          </a:solidFill>
+          <a:prstDash val="solid"/>
+          <a:miter lim="800000"/>
+        </a:ln>
+        <a:ln w="12700" cap="flat" cmpd="sng" algn="ctr">
+          <a:solidFill>
+            <a:schemeClr val="phClr"/>
+          </a:solidFill>
+          <a:prstDash val="solid"/>
+          <a:miter lim="800000"/>
+        </a:ln>
+        <a:ln w="19050" cap="flat" cmpd="sng" algn="ctr">
+          <a:solidFill>
+            <a:schemeClr val="phClr"/>
+          </a:solidFill>
+          <a:prstDash val="solid"/>
+          <a:miter lim="800000"/>
+        </a:ln>
+      </a:lnStyleLst>
+      <a:effectStyleLst>
+        <a:effectStyle>
+          <a:effectLst/>
+        </a:effectStyle>
+        <a:effectStyle>
+          <a:effectLst/>
+        </a:effectStyle>
+        <a:effectStyle>
+          <a:effectLst>
+            <a:outerShdw blurRad="57150" dist="19050" dir="5400000" algn="ctr" rotWithShape="0">
+              <a:srgbClr val="000000">
+                <a:alpha val="63000"/>
+              </a:srgbClr>
+            </a:outerShdw>
+          </a:effectLst>
+        </a:effectStyle>
+      </a:effectStyleLst>
+      <a:bgFillStyleLst>
+        <a:solidFill>
+          <a:schemeClr val="phClr"/>
+        </a:solidFill>
+        <a:solidFill>
+          <a:schemeClr val="phClr">
+            <a:tint val="95000"/>
+            <a:satMod val="170000"/>
+          </a:schemeClr>
+        </a:solidFill>
+        <a:gradFill rotWithShape="1">
+          <a:gsLst>
+            <a:gs pos="0">
+              <a:schemeClr val="phClr">
+                <a:tint val="93000"/>
+                <a:satMod val="150000"/>
+                <a:shade val="98000"/>
+                <a:lumMod val="102000"/>
+              </a:schemeClr>
+            </a:gs>
+            <a:gs pos="50000">
+              <a:schemeClr val="phClr">
+                <a:tint val="98000"/>
+                <a:satMod val="130000"/>
+                <a:shade val="90000"/>
+                <a:lumMod val="103000"/>
+              </a:schemeClr>
+            </a:gs>
+            <a:gs pos="100000">
+              <a:schemeClr val="phClr">
+                <a:shade val="63000"/>
+                <a:satMod val="120000"/>
+              </a:schemeClr>
+            </a:gs>
+          </a:gsLst>
+          <a:lin ang="5400000" scaled="0"/>
+        </a:gradFill>
+      </a:bgFillStyleLst>
+    </a:fmtScheme>
+  </a:themeElements>
   <a:extLst>
     <a:ext uri="{05A4C25C-085E-4340-85A3-A5531E510DB2}">
       <thm15:themeFamily xmlns:thm15="http://schemas.microsoft.com/office/thememl/2012/main" name="Office Theme" id="{62F939B6-93AF-4DB8-9C6B-D6C7DFDC589F}" vid="{4A3C46E8-61CC-4603-A589-7422A47A8E4A}"/>
